--- a/content/busi1763/files/Unilever_MA_EN.pptx
+++ b/content/busi1763/files/Unilever_MA_EN.pptx
@@ -7,9 +7,11 @@
   <p:sldIdLst>
     <p:sldId id="256" r:id="rId2"/>
     <p:sldId id="257" r:id="rId3"/>
+    <p:sldId id="258" r:id="rId4"/>
+    <p:sldId id="259" r:id="rId5"/>
   </p:sldIdLst>
   <p:notesMasterIdLst>
-    <p:notesMasterId r:id="rId4"/>
+    <p:notesMasterId r:id="rId6"/>
   </p:notesMasterIdLst>
   <p:sldSz cx="9144000" cy="5143500"/>
   <p:notesSz cx="5143500" cy="9144000"/>
@@ -108,10 +110,12 @@
   <p:extLst>
     <p:ext uri="{521415D9-36F7-43E2-AB2F-B90AF26B5E84}">
       <p14:sectionLst xmlns:p14="http://schemas.microsoft.com/office/powerpoint/2010/main">
-        <p14:section name="M&amp;A" id="{633e3764-271a-32b0-f2c9-35a906aa02f5}">
+        <p14:section name="M&amp;A" id="{4dfeab94-4492-07ea-2ea1-9c67a6f14657}">
           <p14:sldIdLst>
             <p14:sldId id="256"/>
             <p14:sldId id="257"/>
+            <p14:sldId id="258"/>
+            <p14:sldId id="259"/>
           </p14:sldIdLst>
         </p14:section>
       </p14:sectionLst>
@@ -518,7 +522,7 @@
           <a:p>
             <a:r>
               <a:rPr lang="en-US" dirty="0"/>
-              <a:t>M&amp;A means acquisition or merger. Unilever itself was born from a merger in 1929. First it grew by buying: Bestfoods for more power with supermarkets, Ben &amp; Jerry's kept standalone, Dollar Shave Club to learn online selling, but with no real synergy. Then the turning point: Kraft Heinz tried to buy Unilever in 2017, and shareholders blocked the GSK deal in 2022. Since 2023 Unilever has been selling: Dollar Shave Club, ice cream, and now food.</a:t>
+              <a:t>M&amp;A means mergers and acquisitions. Acquisition: one company buys another. Merger: two similar companies join. Six types, four ways to integrate, the goal is synergy, but 70 to 90 percent fail, mostly at integration. Cross-border M&amp;A is also a form of FDI.</a:t>
             </a:r>
             <a:endParaRPr lang="en-US" dirty="0"/>
           </a:p>
@@ -606,7 +610,7 @@
           <a:p>
             <a:r>
               <a:rPr lang="en-US" dirty="0"/>
-              <a:t>Why sell food? It grows slowly, a spin-off releases value and avoids the conglomerate discount, and the cash can buy beauty brands. Through M&amp;A theory: the deal is horizontal, the synergy is about 300 million dollars a year, and the risks are people integration, regulators, and a long timeline to 2027. My conclusion: overall a success, but deals without synergy failed. Cross-border M&amp;A is also one form of FDI.</a:t>
+              <a:t>M&amp;A means acquisition or merger. Unilever itself was born from a merger in 1929. First it grew by buying: Bestfoods for more power with supermarkets, Ben &amp; Jerry's kept standalone, Dollar Shave Club to learn online selling, but with no real synergy. Then the turning point: Kraft Heinz tried to buy Unilever in 2017, and shareholders blocked the GSK deal in 2022. Since 2023 Unilever has been selling: Dollar Shave Club, ice cream, and now food.</a:t>
             </a:r>
             <a:endParaRPr lang="en-US" dirty="0"/>
           </a:p>
@@ -630,6 +634,182 @@
             <a:fld id="{F7021451-1387-4CA6-816F-3879F97B5CBC}" type="slidenum">
               <a:rPr lang="en-US"/>
               <a:t>2</a:t>
+            </a:fld>
+            <a:endParaRPr lang="en-US"/>
+          </a:p>
+        </p:txBody>
+      </p:sp>
+    </p:spTree>
+    <p:extLst>
+      <p:ext uri="{BB962C8B-B14F-4D97-AF65-F5344CB8AC3E}">
+        <p14:creationId xmlns:p14="http://schemas.microsoft.com/office/powerpoint/2010/main" val="1024086991"/>
+      </p:ext>
+    </p:extLst>
+  </p:cSld>
+  <p:clrMapOvr>
+    <a:masterClrMapping/>
+  </p:clrMapOvr>
+</p:notes>
+</file>
+
+<file path=ppt/notesSlides/notesSlide3.xml><?xml version="1.0" encoding="utf-8"?>
+<p:notes xmlns:a="http://schemas.openxmlformats.org/drawingml/2006/main" xmlns:r="http://schemas.openxmlformats.org/officeDocument/2006/relationships" xmlns:p="http://schemas.openxmlformats.org/presentationml/2006/main">
+  <p:cSld>
+    <p:spTree>
+      <p:nvGrpSpPr>
+        <p:cNvPr id="1" name=""/>
+        <p:cNvGrpSpPr/>
+        <p:nvPr/>
+      </p:nvGrpSpPr>
+      <p:grpSpPr>
+        <a:xfrm>
+          <a:off x="0" y="0"/>
+          <a:ext cx="0" cy="0"/>
+          <a:chOff x="0" y="0"/>
+          <a:chExt cx="0" cy="0"/>
+        </a:xfrm>
+      </p:grpSpPr>
+      <p:sp>
+        <p:nvSpPr>
+          <p:cNvPr id="2" name="Slide Image Placeholder 1"/>
+          <p:cNvSpPr>
+            <a:spLocks noGrp="1" noRot="1" noChangeAspect="1"/>
+          </p:cNvSpPr>
+          <p:nvPr>
+            <p:ph type="sldImg"/>
+          </p:nvPr>
+        </p:nvSpPr>
+        <p:spPr/>
+      </p:sp>
+      <p:sp>
+        <p:nvSpPr>
+          <p:cNvPr id="3" name="Notes Placeholder 2"/>
+          <p:cNvSpPr>
+            <a:spLocks noGrp="1"/>
+          </p:cNvSpPr>
+          <p:nvPr>
+            <p:ph type="body" idx="1"/>
+          </p:nvPr>
+        </p:nvSpPr>
+        <p:spPr/>
+        <p:txBody>
+          <a:bodyPr/>
+          <a:lstStyle/>
+          <a:p>
+            <a:r>
+              <a:rPr lang="en-US" dirty="0"/>
+              <a:t>Why sell food? It grows slowly, a spin-off releases value and avoids the conglomerate discount, and the cash can buy beauty brands. Through M&amp;A theory: the deal is horizontal, the synergy is about 300 million dollars a year, and the risks are people integration, regulators, and a long timeline to 2027. My conclusion: overall a success, but deals without synergy failed. Cross-border M&amp;A is also one form of FDI.</a:t>
+            </a:r>
+            <a:endParaRPr lang="en-US" dirty="0"/>
+          </a:p>
+        </p:txBody>
+      </p:sp>
+      <p:sp>
+        <p:nvSpPr>
+          <p:cNvPr id="4" name="Slide Number Placeholder 3"/>
+          <p:cNvSpPr>
+            <a:spLocks noGrp="1"/>
+          </p:cNvSpPr>
+          <p:nvPr>
+            <p:ph type="sldNum" sz="quarter" idx="10"/>
+          </p:nvPr>
+        </p:nvSpPr>
+        <p:spPr/>
+        <p:txBody>
+          <a:bodyPr/>
+          <a:lstStyle/>
+          <a:p>
+            <a:fld id="{F7021451-1387-4CA6-816F-3879F97B5CBC}" type="slidenum">
+              <a:rPr lang="en-US"/>
+              <a:t>3</a:t>
+            </a:fld>
+            <a:endParaRPr lang="en-US"/>
+          </a:p>
+        </p:txBody>
+      </p:sp>
+    </p:spTree>
+    <p:extLst>
+      <p:ext uri="{BB962C8B-B14F-4D97-AF65-F5344CB8AC3E}">
+        <p14:creationId xmlns:p14="http://schemas.microsoft.com/office/powerpoint/2010/main" val="1024086991"/>
+      </p:ext>
+    </p:extLst>
+  </p:cSld>
+  <p:clrMapOvr>
+    <a:masterClrMapping/>
+  </p:clrMapOvr>
+</p:notes>
+</file>
+
+<file path=ppt/notesSlides/notesSlide4.xml><?xml version="1.0" encoding="utf-8"?>
+<p:notes xmlns:a="http://schemas.openxmlformats.org/drawingml/2006/main" xmlns:r="http://schemas.openxmlformats.org/officeDocument/2006/relationships" xmlns:p="http://schemas.openxmlformats.org/presentationml/2006/main">
+  <p:cSld>
+    <p:spTree>
+      <p:nvGrpSpPr>
+        <p:cNvPr id="1" name=""/>
+        <p:cNvGrpSpPr/>
+        <p:nvPr/>
+      </p:nvGrpSpPr>
+      <p:grpSpPr>
+        <a:xfrm>
+          <a:off x="0" y="0"/>
+          <a:ext cx="0" cy="0"/>
+          <a:chOff x="0" y="0"/>
+          <a:chExt cx="0" cy="0"/>
+        </a:xfrm>
+      </p:grpSpPr>
+      <p:sp>
+        <p:nvSpPr>
+          <p:cNvPr id="2" name="Slide Image Placeholder 1"/>
+          <p:cNvSpPr>
+            <a:spLocks noGrp="1" noRot="1" noChangeAspect="1"/>
+          </p:cNvSpPr>
+          <p:nvPr>
+            <p:ph type="sldImg"/>
+          </p:nvPr>
+        </p:nvSpPr>
+        <p:spPr/>
+      </p:sp>
+      <p:sp>
+        <p:nvSpPr>
+          <p:cNvPr id="3" name="Notes Placeholder 2"/>
+          <p:cNvSpPr>
+            <a:spLocks noGrp="1"/>
+          </p:cNvSpPr>
+          <p:nvPr>
+            <p:ph type="body" idx="1"/>
+          </p:nvPr>
+        </p:nvSpPr>
+        <p:spPr/>
+        <p:txBody>
+          <a:bodyPr/>
+          <a:lstStyle/>
+          <a:p>
+            <a:r>
+              <a:rPr lang="en-US" dirty="0"/>
+              <a:t>References for the M&amp;A section, Harvard style. Merge into the group reference slide.</a:t>
+            </a:r>
+            <a:endParaRPr lang="en-US" dirty="0"/>
+          </a:p>
+        </p:txBody>
+      </p:sp>
+      <p:sp>
+        <p:nvSpPr>
+          <p:cNvPr id="4" name="Slide Number Placeholder 3"/>
+          <p:cNvSpPr>
+            <a:spLocks noGrp="1"/>
+          </p:cNvSpPr>
+          <p:nvPr>
+            <p:ph type="sldNum" sz="quarter" idx="10"/>
+          </p:nvPr>
+        </p:nvSpPr>
+        <p:spPr/>
+        <p:txBody>
+          <a:bodyPr/>
+          <a:lstStyle/>
+          <a:p>
+            <a:fld id="{F7021451-1387-4CA6-816F-3879F97B5CBC}" type="slidenum">
+              <a:rPr lang="en-US"/>
+              <a:t>4</a:t>
             </a:fld>
             <a:endParaRPr lang="en-US"/>
           </a:p>
@@ -1076,7 +1256,7 @@
                   <a:schemeClr val="tx2"/>
                 </a:solidFill>
               </a:rPr>
-              <a:t>Unilever M&amp;A: from buying to selling</a:t>
+              <a:t>What is M&amp;A?</a:t>
             </a:r>
             <a:endParaRPr lang="en-US" sz="2800" dirty="0"/>
           </a:p>
@@ -1112,7 +1292,7 @@
                   <a:schemeClr val="tx1"/>
                 </a:solidFill>
               </a:rPr>
-              <a:t>Twenty years of growth by acquisition, then a turn to focus</a:t>
+              <a:t>Key ideas from Lecture 3 that we use for Unilever</a:t>
             </a:r>
             <a:endParaRPr lang="en-US" sz="1300" dirty="0"/>
           </a:p>
@@ -1120,18 +1300,18 @@
       </p:sp>
       <p:sp>
         <p:nvSpPr>
-          <p:cNvPr id="4" name="born"/>
+          <p:cNvPr id="4" name="def0"/>
           <p:cNvSpPr/>
           <p:nvPr/>
         </p:nvSpPr>
         <p:spPr>
           <a:xfrm>
-            <a:off x="457200" y="1188720"/>
-            <a:ext cx="8229600" cy="347472"/>
+            <a:off x="457200" y="1234440"/>
+            <a:ext cx="2468880" cy="822960"/>
           </a:xfrm>
           <a:prstGeom prst="roundRect">
             <a:avLst>
-              <a:gd name="adj" fmla="val 21053"/>
+              <a:gd name="adj" fmla="val 11111"/>
             </a:avLst>
           </a:prstGeom>
           <a:solidFill>
@@ -1148,8 +1328,8 @@
         </p:nvSpPr>
         <p:spPr>
           <a:xfrm>
-            <a:off x="594360" y="1188720"/>
-            <a:ext cx="7955280" cy="347472"/>
+            <a:off x="594360" y="1234440"/>
+            <a:ext cx="2240280" cy="822960"/>
           </a:xfrm>
           <a:prstGeom prst="rect">
             <a:avLst/>
@@ -1165,35 +1345,49 @@
               <a:buNone/>
             </a:pPr>
             <a:r>
-              <a:rPr lang="en-US" sz="1200" b="1" dirty="0">
+              <a:rPr lang="en-US" sz="1500" b="1" dirty="0">
+                <a:solidFill>
+                  <a:schemeClr val="tx2"/>
+                </a:solidFill>
+              </a:rPr>
+              <a:t>Acquisition</a:t>
+            </a:r>
+            <a:endParaRPr lang="en-US" sz="1500" dirty="0"/>
+          </a:p>
+          <a:p>
+            <a:pPr indent="0" marL="0">
+              <a:buNone/>
+            </a:pPr>
+            <a:r>
+              <a:rPr lang="en-US" sz="1200" dirty="0">
                 <a:solidFill>
                   <a:schemeClr val="tx1"/>
                 </a:solidFill>
               </a:rPr>
-              <a:t>1929 · Born from a merger: Lever Brothers (UK) + Margarine Unie (NL)</a:t>
-            </a:r>
-            <a:endParaRPr lang="en-US" sz="1200" dirty="0"/>
-          </a:p>
-        </p:txBody>
-      </p:sp>
-      <p:sp>
-        <p:nvSpPr>
-          <p:cNvPr id="6" name="phase0"/>
+              <a:t>One company buys another</a:t>
+            </a:r>
+            <a:endParaRPr lang="en-US" sz="1500" dirty="0"/>
+          </a:p>
+        </p:txBody>
+      </p:sp>
+      <p:sp>
+        <p:nvSpPr>
+          <p:cNvPr id="6" name="def1"/>
           <p:cNvSpPr/>
           <p:nvPr/>
         </p:nvSpPr>
         <p:spPr>
           <a:xfrm>
-            <a:off x="457200" y="1691640"/>
-            <a:ext cx="2606040" cy="566928"/>
+            <a:off x="457200" y="2194560"/>
+            <a:ext cx="2468880" cy="822960"/>
           </a:xfrm>
           <a:prstGeom prst="roundRect">
             <a:avLst>
-              <a:gd name="adj" fmla="val 12903"/>
+              <a:gd name="adj" fmla="val 11111"/>
             </a:avLst>
           </a:prstGeom>
           <a:solidFill>
-            <a:schemeClr val="accent1"/>
+            <a:schemeClr val="bg2"/>
           </a:solidFill>
           <a:ln/>
         </p:spPr>
@@ -1206,8 +1400,8 @@
         </p:nvSpPr>
         <p:spPr>
           <a:xfrm>
-            <a:off x="566928" y="1691640"/>
-            <a:ext cx="2386584" cy="566928"/>
+            <a:off x="594360" y="2194560"/>
+            <a:ext cx="2240280" cy="822960"/>
           </a:xfrm>
           <a:prstGeom prst="rect">
             <a:avLst/>
@@ -1225,10 +1419,10 @@
             <a:r>
               <a:rPr lang="en-US" sz="1500" b="1" dirty="0">
                 <a:solidFill>
-                  <a:srgbClr val="FFFFFF"/>
-                </a:solidFill>
-              </a:rPr>
-              <a:t>BUY</a:t>
+                  <a:schemeClr val="tx2"/>
+                </a:solidFill>
+              </a:rPr>
+              <a:t>Merger</a:t>
             </a:r>
             <a:endParaRPr lang="en-US" sz="1500" dirty="0"/>
           </a:p>
@@ -1237,12 +1431,12 @@
               <a:buNone/>
             </a:pPr>
             <a:r>
-              <a:rPr lang="en-US" sz="1050" dirty="0">
-                <a:solidFill>
-                  <a:srgbClr val="FFFFFF"/>
-                </a:solidFill>
-              </a:rPr>
-              <a:t>Grow and enter new markets</a:t>
+              <a:rPr lang="en-US" sz="1200" dirty="0">
+                <a:solidFill>
+                  <a:schemeClr val="tx1"/>
+                </a:solidFill>
+              </a:rPr>
+              <a:t>Two similar companies join into one</a:t>
             </a:r>
             <a:endParaRPr lang="en-US" sz="1500" dirty="0"/>
           </a:p>
@@ -1250,354 +1444,77 @@
       </p:sp>
       <p:sp>
         <p:nvSpPr>
-          <p:cNvPr id="8" name="yr00"/>
+          <p:cNvPr id="8" name="Text 6"/>
+          <p:cNvSpPr txBox="1"/>
+          <p:nvPr/>
+        </p:nvSpPr>
+        <p:spPr>
+          <a:xfrm>
+            <a:off x="3154680" y="1234440"/>
+            <a:ext cx="2743200" cy="274320"/>
+          </a:xfrm>
+          <a:prstGeom prst="rect">
+            <a:avLst/>
+          </a:prstGeom>
+          <a:noFill/>
+          <a:ln/>
+        </p:spPr>
+        <p:txBody>
+          <a:bodyPr wrap="square" lIns="0" tIns="0" rIns="0" bIns="0" rtlCol="0" anchor="ctr"/>
+          <a:lstStyle/>
+          <a:p>
+            <a:pPr indent="0" marL="0">
+              <a:buNone/>
+            </a:pPr>
+            <a:r>
+              <a:rPr lang="en-US" sz="1300" b="1" dirty="0">
+                <a:solidFill>
+                  <a:schemeClr val="accent1"/>
+                </a:solidFill>
+              </a:rPr>
+              <a:t>Six types</a:t>
+            </a:r>
+            <a:endParaRPr lang="en-US" sz="1300" dirty="0"/>
+          </a:p>
+        </p:txBody>
+      </p:sp>
+      <p:sp>
+        <p:nvSpPr>
+          <p:cNvPr id="9" name="type0"/>
           <p:cNvSpPr/>
           <p:nvPr/>
         </p:nvSpPr>
         <p:spPr>
           <a:xfrm>
-            <a:off x="457200" y="2414016"/>
-            <a:ext cx="475488" cy="475488"/>
-          </a:xfrm>
-          <a:prstGeom prst="ellipse">
-            <a:avLst/>
-          </a:prstGeom>
-          <a:solidFill>
-            <a:schemeClr val="accent1"/>
-          </a:solidFill>
-          <a:ln/>
-        </p:spPr>
-      </p:sp>
-      <p:sp>
-        <p:nvSpPr>
-          <p:cNvPr id="9" name="Text 7"/>
-          <p:cNvSpPr txBox="1"/>
-          <p:nvPr/>
-        </p:nvSpPr>
-        <p:spPr>
-          <a:xfrm>
-            <a:off x="457200" y="2414016"/>
-            <a:ext cx="475488" cy="475488"/>
-          </a:xfrm>
-          <a:prstGeom prst="rect">
-            <a:avLst/>
-          </a:prstGeom>
-          <a:noFill/>
-          <a:ln/>
-        </p:spPr>
-        <p:txBody>
-          <a:bodyPr wrap="square" lIns="0" tIns="0" rIns="0" bIns="0" rtlCol="0" anchor="ctr"/>
-          <a:lstStyle/>
-          <a:p>
-            <a:pPr algn="ctr" indent="0" marL="0">
-              <a:buNone/>
-            </a:pPr>
-            <a:r>
-              <a:rPr lang="en-US" sz="1000" b="1" dirty="0">
-                <a:solidFill>
-                  <a:srgbClr val="FFFFFF"/>
-                </a:solidFill>
-              </a:rPr>
-              <a:t>2000</a:t>
-            </a:r>
-            <a:endParaRPr lang="en-US" sz="1000" dirty="0"/>
-          </a:p>
-        </p:txBody>
-      </p:sp>
-      <p:sp>
-        <p:nvSpPr>
-          <p:cNvPr id="10" name="Text 8"/>
-          <p:cNvSpPr txBox="1"/>
-          <p:nvPr/>
-        </p:nvSpPr>
-        <p:spPr>
-          <a:xfrm>
-            <a:off x="1005840" y="2377440"/>
-            <a:ext cx="2057400" cy="603504"/>
-          </a:xfrm>
-          <a:prstGeom prst="rect">
-            <a:avLst/>
-          </a:prstGeom>
-          <a:noFill/>
-          <a:ln/>
-        </p:spPr>
-        <p:txBody>
-          <a:bodyPr wrap="square" lIns="0" tIns="0" rIns="0" bIns="0" rtlCol="0" anchor="t"/>
-          <a:lstStyle/>
-          <a:p>
-            <a:pPr indent="0" marL="0">
-              <a:buNone/>
-            </a:pPr>
-            <a:r>
-              <a:rPr lang="en-US" sz="1250" b="1" dirty="0">
-                <a:solidFill>
-                  <a:schemeClr val="tx1"/>
-                </a:solidFill>
-              </a:rPr>
-              <a:t>Bestfoods</a:t>
-            </a:r>
-            <a:endParaRPr lang="en-US" sz="1250" dirty="0"/>
-          </a:p>
-          <a:p>
-            <a:pPr indent="0" marL="0">
-              <a:buNone/>
-            </a:pPr>
-            <a:r>
-              <a:rPr lang="en-US" sz="1050" dirty="0">
-                <a:solidFill>
-                  <a:schemeClr val="accent4"/>
-                </a:solidFill>
-              </a:rPr>
-              <a:t>$24.3bn · Knorr, Hellmann's</a:t>
-            </a:r>
-            <a:endParaRPr lang="en-US" sz="1250" dirty="0"/>
-          </a:p>
-        </p:txBody>
-      </p:sp>
-      <p:sp>
-        <p:nvSpPr>
-          <p:cNvPr id="11" name="yr01"/>
-          <p:cNvSpPr/>
-          <p:nvPr/>
-        </p:nvSpPr>
-        <p:spPr>
-          <a:xfrm>
-            <a:off x="457200" y="3127248"/>
-            <a:ext cx="475488" cy="475488"/>
-          </a:xfrm>
-          <a:prstGeom prst="ellipse">
-            <a:avLst/>
-          </a:prstGeom>
-          <a:solidFill>
-            <a:schemeClr val="accent1"/>
-          </a:solidFill>
-          <a:ln/>
-        </p:spPr>
-      </p:sp>
-      <p:sp>
-        <p:nvSpPr>
-          <p:cNvPr id="12" name="Text 10"/>
-          <p:cNvSpPr txBox="1"/>
-          <p:nvPr/>
-        </p:nvSpPr>
-        <p:spPr>
-          <a:xfrm>
-            <a:off x="457200" y="3127248"/>
-            <a:ext cx="475488" cy="475488"/>
-          </a:xfrm>
-          <a:prstGeom prst="rect">
-            <a:avLst/>
-          </a:prstGeom>
-          <a:noFill/>
-          <a:ln/>
-        </p:spPr>
-        <p:txBody>
-          <a:bodyPr wrap="square" lIns="0" tIns="0" rIns="0" bIns="0" rtlCol="0" anchor="ctr"/>
-          <a:lstStyle/>
-          <a:p>
-            <a:pPr algn="ctr" indent="0" marL="0">
-              <a:buNone/>
-            </a:pPr>
-            <a:r>
-              <a:rPr lang="en-US" sz="1000" b="1" dirty="0">
-                <a:solidFill>
-                  <a:srgbClr val="FFFFFF"/>
-                </a:solidFill>
-              </a:rPr>
-              <a:t>2000</a:t>
-            </a:r>
-            <a:endParaRPr lang="en-US" sz="1000" dirty="0"/>
-          </a:p>
-        </p:txBody>
-      </p:sp>
-      <p:sp>
-        <p:nvSpPr>
-          <p:cNvPr id="13" name="Text 11"/>
-          <p:cNvSpPr txBox="1"/>
-          <p:nvPr/>
-        </p:nvSpPr>
-        <p:spPr>
-          <a:xfrm>
-            <a:off x="1005840" y="3090672"/>
-            <a:ext cx="2057400" cy="603504"/>
-          </a:xfrm>
-          <a:prstGeom prst="rect">
-            <a:avLst/>
-          </a:prstGeom>
-          <a:noFill/>
-          <a:ln/>
-        </p:spPr>
-        <p:txBody>
-          <a:bodyPr wrap="square" lIns="0" tIns="0" rIns="0" bIns="0" rtlCol="0" anchor="t"/>
-          <a:lstStyle/>
-          <a:p>
-            <a:pPr indent="0" marL="0">
-              <a:buNone/>
-            </a:pPr>
-            <a:r>
-              <a:rPr lang="en-US" sz="1250" b="1" dirty="0">
-                <a:solidFill>
-                  <a:schemeClr val="tx1"/>
-                </a:solidFill>
-              </a:rPr>
-              <a:t>Ben &amp; Jerry's</a:t>
-            </a:r>
-            <a:endParaRPr lang="en-US" sz="1250" dirty="0"/>
-          </a:p>
-          <a:p>
-            <a:pPr indent="0" marL="0">
-              <a:buNone/>
-            </a:pPr>
-            <a:r>
-              <a:rPr lang="en-US" sz="1050" dirty="0">
-                <a:solidFill>
-                  <a:schemeClr val="accent4"/>
-                </a:solidFill>
-              </a:rPr>
-              <a:t>$326m · standalone, own board</a:t>
-            </a:r>
-            <a:endParaRPr lang="en-US" sz="1250" dirty="0"/>
-          </a:p>
-        </p:txBody>
-      </p:sp>
-      <p:sp>
-        <p:nvSpPr>
-          <p:cNvPr id="14" name="yr02"/>
-          <p:cNvSpPr/>
-          <p:nvPr/>
-        </p:nvSpPr>
-        <p:spPr>
-          <a:xfrm>
-            <a:off x="457200" y="3840480"/>
-            <a:ext cx="475488" cy="475488"/>
-          </a:xfrm>
-          <a:prstGeom prst="ellipse">
-            <a:avLst/>
-          </a:prstGeom>
-          <a:solidFill>
-            <a:schemeClr val="accent1"/>
-          </a:solidFill>
-          <a:ln/>
-        </p:spPr>
-      </p:sp>
-      <p:sp>
-        <p:nvSpPr>
-          <p:cNvPr id="15" name="Text 13"/>
-          <p:cNvSpPr txBox="1"/>
-          <p:nvPr/>
-        </p:nvSpPr>
-        <p:spPr>
-          <a:xfrm>
-            <a:off x="457200" y="3840480"/>
-            <a:ext cx="475488" cy="475488"/>
-          </a:xfrm>
-          <a:prstGeom prst="rect">
-            <a:avLst/>
-          </a:prstGeom>
-          <a:noFill/>
-          <a:ln/>
-        </p:spPr>
-        <p:txBody>
-          <a:bodyPr wrap="square" lIns="0" tIns="0" rIns="0" bIns="0" rtlCol="0" anchor="ctr"/>
-          <a:lstStyle/>
-          <a:p>
-            <a:pPr algn="ctr" indent="0" marL="0">
-              <a:buNone/>
-            </a:pPr>
-            <a:r>
-              <a:rPr lang="en-US" sz="1000" b="1" dirty="0">
-                <a:solidFill>
-                  <a:srgbClr val="FFFFFF"/>
-                </a:solidFill>
-              </a:rPr>
-              <a:t>2016</a:t>
-            </a:r>
-            <a:endParaRPr lang="en-US" sz="1000" dirty="0"/>
-          </a:p>
-        </p:txBody>
-      </p:sp>
-      <p:sp>
-        <p:nvSpPr>
-          <p:cNvPr id="16" name="Text 14"/>
-          <p:cNvSpPr txBox="1"/>
-          <p:nvPr/>
-        </p:nvSpPr>
-        <p:spPr>
-          <a:xfrm>
-            <a:off x="1005840" y="3803904"/>
-            <a:ext cx="2057400" cy="603504"/>
-          </a:xfrm>
-          <a:prstGeom prst="rect">
-            <a:avLst/>
-          </a:prstGeom>
-          <a:noFill/>
-          <a:ln/>
-        </p:spPr>
-        <p:txBody>
-          <a:bodyPr wrap="square" lIns="0" tIns="0" rIns="0" bIns="0" rtlCol="0" anchor="t"/>
-          <a:lstStyle/>
-          <a:p>
-            <a:pPr indent="0" marL="0">
-              <a:buNone/>
-            </a:pPr>
-            <a:r>
-              <a:rPr lang="en-US" sz="1250" b="1" dirty="0">
-                <a:solidFill>
-                  <a:schemeClr val="tx1"/>
-                </a:solidFill>
-              </a:rPr>
-              <a:t>Dollar Shave Club</a:t>
-            </a:r>
-            <a:endParaRPr lang="en-US" sz="1250" dirty="0"/>
-          </a:p>
-          <a:p>
-            <a:pPr indent="0" marL="0">
-              <a:buNone/>
-            </a:pPr>
-            <a:r>
-              <a:rPr lang="en-US" sz="1050" dirty="0">
-                <a:solidFill>
-                  <a:schemeClr val="accent4"/>
-                </a:solidFill>
-              </a:rPr>
-              <a:t>~$1bn · online direct-to-consumer</a:t>
-            </a:r>
-            <a:endParaRPr lang="en-US" sz="1250" dirty="0"/>
-          </a:p>
-        </p:txBody>
-      </p:sp>
-      <p:sp>
-        <p:nvSpPr>
-          <p:cNvPr id="17" name="phase1"/>
-          <p:cNvSpPr/>
-          <p:nvPr/>
-        </p:nvSpPr>
-        <p:spPr>
-          <a:xfrm>
-            <a:off x="3268980" y="1691640"/>
-            <a:ext cx="2606040" cy="566928"/>
+            <a:off x="3154680" y="1572768"/>
+            <a:ext cx="1280160" cy="365760"/>
           </a:xfrm>
           <a:prstGeom prst="roundRect">
             <a:avLst>
-              <a:gd name="adj" fmla="val 12903"/>
+              <a:gd name="adj" fmla="val 50000"/>
             </a:avLst>
           </a:prstGeom>
           <a:solidFill>
-            <a:schemeClr val="accent3"/>
-          </a:solidFill>
-          <a:ln/>
-        </p:spPr>
-      </p:sp>
-      <p:sp>
-        <p:nvSpPr>
-          <p:cNvPr id="18" name="Text 16"/>
-          <p:cNvSpPr txBox="1"/>
-          <p:nvPr/>
-        </p:nvSpPr>
-        <p:spPr>
-          <a:xfrm>
-            <a:off x="3378708" y="1691640"/>
-            <a:ext cx="2386584" cy="566928"/>
+            <a:srgbClr val="FFFFFF"/>
+          </a:solidFill>
+          <a:ln w="12700">
+            <a:solidFill>
+              <a:schemeClr val="accent1"/>
+            </a:solidFill>
+            <a:prstDash val="solid"/>
+          </a:ln>
+        </p:spPr>
+      </p:sp>
+      <p:sp>
+        <p:nvSpPr>
+          <p:cNvPr id="10" name="Text 8"/>
+          <p:cNvSpPr txBox="1"/>
+          <p:nvPr/>
+        </p:nvSpPr>
+        <p:spPr>
+          <a:xfrm>
+            <a:off x="3154680" y="1572768"/>
+            <a:ext cx="1280160" cy="365760"/>
           </a:xfrm>
           <a:prstGeom prst="rect">
             <a:avLst/>
@@ -1609,264 +1526,387 @@
           <a:bodyPr wrap="square" lIns="0" tIns="0" rIns="0" bIns="0" rtlCol="0" anchor="ctr"/>
           <a:lstStyle/>
           <a:p>
-            <a:pPr indent="0" marL="0">
-              <a:buNone/>
-            </a:pPr>
-            <a:r>
-              <a:rPr lang="en-US" sz="1500" b="1" dirty="0">
-                <a:solidFill>
-                  <a:srgbClr val="FFFFFF"/>
-                </a:solidFill>
-              </a:rPr>
-              <a:t>TURNING POINT</a:t>
-            </a:r>
-            <a:endParaRPr lang="en-US" sz="1500" dirty="0"/>
-          </a:p>
-          <a:p>
-            <a:pPr indent="0" marL="0">
+            <a:pPr algn="ctr" indent="0" marL="0">
               <a:buNone/>
             </a:pPr>
             <a:r>
               <a:rPr lang="en-US" sz="1050" dirty="0">
                 <a:solidFill>
-                  <a:srgbClr val="FFFFFF"/>
-                </a:solidFill>
-              </a:rPr>
-              <a:t>Pressure from bidders, investors</a:t>
-            </a:r>
-            <a:endParaRPr lang="en-US" sz="1500" dirty="0"/>
-          </a:p>
-        </p:txBody>
-      </p:sp>
-      <p:sp>
-        <p:nvSpPr>
-          <p:cNvPr id="19" name="yr10"/>
+                  <a:schemeClr val="tx1"/>
+                </a:solidFill>
+              </a:rPr>
+              <a:t>Horizontal</a:t>
+            </a:r>
+            <a:endParaRPr lang="en-US" sz="1050" dirty="0"/>
+          </a:p>
+        </p:txBody>
+      </p:sp>
+      <p:sp>
+        <p:nvSpPr>
+          <p:cNvPr id="11" name="type1"/>
           <p:cNvSpPr/>
           <p:nvPr/>
         </p:nvSpPr>
         <p:spPr>
           <a:xfrm>
-            <a:off x="3268980" y="2414016"/>
-            <a:ext cx="475488" cy="475488"/>
-          </a:xfrm>
-          <a:prstGeom prst="ellipse">
-            <a:avLst/>
-          </a:prstGeom>
-          <a:solidFill>
-            <a:schemeClr val="accent3"/>
-          </a:solidFill>
-          <a:ln/>
-        </p:spPr>
-      </p:sp>
-      <p:sp>
-        <p:nvSpPr>
-          <p:cNvPr id="20" name="Text 18"/>
-          <p:cNvSpPr txBox="1"/>
-          <p:nvPr/>
-        </p:nvSpPr>
-        <p:spPr>
-          <a:xfrm>
-            <a:off x="3268980" y="2414016"/>
-            <a:ext cx="475488" cy="475488"/>
-          </a:xfrm>
-          <a:prstGeom prst="rect">
-            <a:avLst/>
-          </a:prstGeom>
-          <a:noFill/>
-          <a:ln/>
-        </p:spPr>
-        <p:txBody>
-          <a:bodyPr wrap="square" lIns="0" tIns="0" rIns="0" bIns="0" rtlCol="0" anchor="ctr"/>
-          <a:lstStyle/>
-          <a:p>
-            <a:pPr algn="ctr" indent="0" marL="0">
-              <a:buNone/>
-            </a:pPr>
-            <a:r>
-              <a:rPr lang="en-US" sz="1000" b="1" dirty="0">
-                <a:solidFill>
-                  <a:srgbClr val="FFFFFF"/>
-                </a:solidFill>
-              </a:rPr>
-              <a:t>2017</a:t>
-            </a:r>
-            <a:endParaRPr lang="en-US" sz="1000" dirty="0"/>
-          </a:p>
-        </p:txBody>
-      </p:sp>
-      <p:sp>
-        <p:nvSpPr>
-          <p:cNvPr id="21" name="Text 19"/>
-          <p:cNvSpPr txBox="1"/>
-          <p:nvPr/>
-        </p:nvSpPr>
-        <p:spPr>
-          <a:xfrm>
-            <a:off x="3817620" y="2377440"/>
-            <a:ext cx="2057400" cy="603504"/>
-          </a:xfrm>
-          <a:prstGeom prst="rect">
-            <a:avLst/>
-          </a:prstGeom>
-          <a:noFill/>
-          <a:ln/>
-        </p:spPr>
-        <p:txBody>
-          <a:bodyPr wrap="square" lIns="0" tIns="0" rIns="0" bIns="0" rtlCol="0" anchor="t"/>
-          <a:lstStyle/>
-          <a:p>
-            <a:pPr indent="0" marL="0">
-              <a:buNone/>
-            </a:pPr>
-            <a:r>
-              <a:rPr lang="en-US" sz="1250" b="1" dirty="0">
-                <a:solidFill>
-                  <a:schemeClr val="tx1"/>
-                </a:solidFill>
-              </a:rPr>
-              <a:t>Kraft Heinz bid</a:t>
-            </a:r>
-            <a:endParaRPr lang="en-US" sz="1250" dirty="0"/>
-          </a:p>
-          <a:p>
-            <a:pPr indent="0" marL="0">
-              <a:buNone/>
-            </a:pPr>
-            <a:r>
-              <a:rPr lang="en-US" sz="1050" dirty="0">
-                <a:solidFill>
-                  <a:schemeClr val="accent4"/>
-                </a:solidFill>
-              </a:rPr>
-              <a:t>$143bn offer rejected, then withdrawn</a:t>
-            </a:r>
-            <a:endParaRPr lang="en-US" sz="1250" dirty="0"/>
-          </a:p>
-        </p:txBody>
-      </p:sp>
-      <p:sp>
-        <p:nvSpPr>
-          <p:cNvPr id="22" name="yr11"/>
-          <p:cNvSpPr/>
-          <p:nvPr/>
-        </p:nvSpPr>
-        <p:spPr>
-          <a:xfrm>
-            <a:off x="3268980" y="3127248"/>
-            <a:ext cx="475488" cy="475488"/>
-          </a:xfrm>
-          <a:prstGeom prst="ellipse">
-            <a:avLst/>
-          </a:prstGeom>
-          <a:solidFill>
-            <a:schemeClr val="accent3"/>
-          </a:solidFill>
-          <a:ln/>
-        </p:spPr>
-      </p:sp>
-      <p:sp>
-        <p:nvSpPr>
-          <p:cNvPr id="23" name="Text 21"/>
-          <p:cNvSpPr txBox="1"/>
-          <p:nvPr/>
-        </p:nvSpPr>
-        <p:spPr>
-          <a:xfrm>
-            <a:off x="3268980" y="3127248"/>
-            <a:ext cx="475488" cy="475488"/>
-          </a:xfrm>
-          <a:prstGeom prst="rect">
-            <a:avLst/>
-          </a:prstGeom>
-          <a:noFill/>
-          <a:ln/>
-        </p:spPr>
-        <p:txBody>
-          <a:bodyPr wrap="square" lIns="0" tIns="0" rIns="0" bIns="0" rtlCol="0" anchor="ctr"/>
-          <a:lstStyle/>
-          <a:p>
-            <a:pPr algn="ctr" indent="0" marL="0">
-              <a:buNone/>
-            </a:pPr>
-            <a:r>
-              <a:rPr lang="en-US" sz="1000" b="1" dirty="0">
-                <a:solidFill>
-                  <a:srgbClr val="FFFFFF"/>
-                </a:solidFill>
-              </a:rPr>
-              <a:t>2022</a:t>
-            </a:r>
-            <a:endParaRPr lang="en-US" sz="1000" dirty="0"/>
-          </a:p>
-        </p:txBody>
-      </p:sp>
-      <p:sp>
-        <p:nvSpPr>
-          <p:cNvPr id="24" name="Text 22"/>
-          <p:cNvSpPr txBox="1"/>
-          <p:nvPr/>
-        </p:nvSpPr>
-        <p:spPr>
-          <a:xfrm>
-            <a:off x="3817620" y="3090672"/>
-            <a:ext cx="2057400" cy="603504"/>
-          </a:xfrm>
-          <a:prstGeom prst="rect">
-            <a:avLst/>
-          </a:prstGeom>
-          <a:noFill/>
-          <a:ln/>
-        </p:spPr>
-        <p:txBody>
-          <a:bodyPr wrap="square" lIns="0" tIns="0" rIns="0" bIns="0" rtlCol="0" anchor="t"/>
-          <a:lstStyle/>
-          <a:p>
-            <a:pPr indent="0" marL="0">
-              <a:buNone/>
-            </a:pPr>
-            <a:r>
-              <a:rPr lang="en-US" sz="1250" b="1" dirty="0">
-                <a:solidFill>
-                  <a:schemeClr val="tx1"/>
-                </a:solidFill>
-              </a:rPr>
-              <a:t>GSK Consumer Health</a:t>
-            </a:r>
-            <a:endParaRPr lang="en-US" sz="1250" dirty="0"/>
-          </a:p>
-          <a:p>
-            <a:pPr indent="0" marL="0">
-              <a:buNone/>
-            </a:pPr>
-            <a:r>
-              <a:rPr lang="en-US" sz="1050" dirty="0">
-                <a:solidFill>
-                  <a:schemeClr val="accent4"/>
-                </a:solidFill>
-              </a:rPr>
-              <a:t>£50bn bid dropped after investors objected</a:t>
-            </a:r>
-            <a:endParaRPr lang="en-US" sz="1250" dirty="0"/>
-          </a:p>
-        </p:txBody>
-      </p:sp>
-      <p:sp>
-        <p:nvSpPr>
-          <p:cNvPr id="25" name="phase2"/>
-          <p:cNvSpPr/>
-          <p:nvPr/>
-        </p:nvSpPr>
-        <p:spPr>
-          <a:xfrm>
-            <a:off x="6080760" y="1691640"/>
-            <a:ext cx="2606040" cy="566928"/>
+            <a:off x="4526280" y="1572768"/>
+            <a:ext cx="1280160" cy="365760"/>
           </a:xfrm>
           <a:prstGeom prst="roundRect">
             <a:avLst>
-              <a:gd name="adj" fmla="val 12903"/>
+              <a:gd name="adj" fmla="val 50000"/>
             </a:avLst>
           </a:prstGeom>
           <a:solidFill>
+            <a:srgbClr val="FFFFFF"/>
+          </a:solidFill>
+          <a:ln w="12700">
+            <a:solidFill>
+              <a:schemeClr val="accent1"/>
+            </a:solidFill>
+            <a:prstDash val="solid"/>
+          </a:ln>
+        </p:spPr>
+      </p:sp>
+      <p:sp>
+        <p:nvSpPr>
+          <p:cNvPr id="12" name="Text 10"/>
+          <p:cNvSpPr txBox="1"/>
+          <p:nvPr/>
+        </p:nvSpPr>
+        <p:spPr>
+          <a:xfrm>
+            <a:off x="4526280" y="1572768"/>
+            <a:ext cx="1280160" cy="365760"/>
+          </a:xfrm>
+          <a:prstGeom prst="rect">
+            <a:avLst/>
+          </a:prstGeom>
+          <a:noFill/>
+          <a:ln/>
+        </p:spPr>
+        <p:txBody>
+          <a:bodyPr wrap="square" lIns="0" tIns="0" rIns="0" bIns="0" rtlCol="0" anchor="ctr"/>
+          <a:lstStyle/>
+          <a:p>
+            <a:pPr algn="ctr" indent="0" marL="0">
+              <a:buNone/>
+            </a:pPr>
+            <a:r>
+              <a:rPr lang="en-US" sz="1050" dirty="0">
+                <a:solidFill>
+                  <a:schemeClr val="tx1"/>
+                </a:solidFill>
+              </a:rPr>
+              <a:t>Vertical</a:t>
+            </a:r>
+            <a:endParaRPr lang="en-US" sz="1050" dirty="0"/>
+          </a:p>
+        </p:txBody>
+      </p:sp>
+      <p:sp>
+        <p:nvSpPr>
+          <p:cNvPr id="13" name="type2"/>
+          <p:cNvSpPr/>
+          <p:nvPr/>
+        </p:nvSpPr>
+        <p:spPr>
+          <a:xfrm>
+            <a:off x="3154680" y="2029968"/>
+            <a:ext cx="1280160" cy="365760"/>
+          </a:xfrm>
+          <a:prstGeom prst="roundRect">
+            <a:avLst>
+              <a:gd name="adj" fmla="val 50000"/>
+            </a:avLst>
+          </a:prstGeom>
+          <a:solidFill>
+            <a:srgbClr val="FFFFFF"/>
+          </a:solidFill>
+          <a:ln w="12700">
+            <a:solidFill>
+              <a:schemeClr val="accent1"/>
+            </a:solidFill>
+            <a:prstDash val="solid"/>
+          </a:ln>
+        </p:spPr>
+      </p:sp>
+      <p:sp>
+        <p:nvSpPr>
+          <p:cNvPr id="14" name="Text 12"/>
+          <p:cNvSpPr txBox="1"/>
+          <p:nvPr/>
+        </p:nvSpPr>
+        <p:spPr>
+          <a:xfrm>
+            <a:off x="3154680" y="2029968"/>
+            <a:ext cx="1280160" cy="365760"/>
+          </a:xfrm>
+          <a:prstGeom prst="rect">
+            <a:avLst/>
+          </a:prstGeom>
+          <a:noFill/>
+          <a:ln/>
+        </p:spPr>
+        <p:txBody>
+          <a:bodyPr wrap="square" lIns="0" tIns="0" rIns="0" bIns="0" rtlCol="0" anchor="ctr"/>
+          <a:lstStyle/>
+          <a:p>
+            <a:pPr algn="ctr" indent="0" marL="0">
+              <a:buNone/>
+            </a:pPr>
+            <a:r>
+              <a:rPr lang="en-US" sz="1050" dirty="0">
+                <a:solidFill>
+                  <a:schemeClr val="tx1"/>
+                </a:solidFill>
+              </a:rPr>
+              <a:t>Congeneric</a:t>
+            </a:r>
+            <a:endParaRPr lang="en-US" sz="1050" dirty="0"/>
+          </a:p>
+        </p:txBody>
+      </p:sp>
+      <p:sp>
+        <p:nvSpPr>
+          <p:cNvPr id="15" name="type3"/>
+          <p:cNvSpPr/>
+          <p:nvPr/>
+        </p:nvSpPr>
+        <p:spPr>
+          <a:xfrm>
+            <a:off x="4526280" y="2029968"/>
+            <a:ext cx="1280160" cy="365760"/>
+          </a:xfrm>
+          <a:prstGeom prst="roundRect">
+            <a:avLst>
+              <a:gd name="adj" fmla="val 50000"/>
+            </a:avLst>
+          </a:prstGeom>
+          <a:solidFill>
+            <a:srgbClr val="FFFFFF"/>
+          </a:solidFill>
+          <a:ln w="12700">
+            <a:solidFill>
+              <a:schemeClr val="accent1"/>
+            </a:solidFill>
+            <a:prstDash val="solid"/>
+          </a:ln>
+        </p:spPr>
+      </p:sp>
+      <p:sp>
+        <p:nvSpPr>
+          <p:cNvPr id="16" name="Text 14"/>
+          <p:cNvSpPr txBox="1"/>
+          <p:nvPr/>
+        </p:nvSpPr>
+        <p:spPr>
+          <a:xfrm>
+            <a:off x="4526280" y="2029968"/>
+            <a:ext cx="1280160" cy="365760"/>
+          </a:xfrm>
+          <a:prstGeom prst="rect">
+            <a:avLst/>
+          </a:prstGeom>
+          <a:noFill/>
+          <a:ln/>
+        </p:spPr>
+        <p:txBody>
+          <a:bodyPr wrap="square" lIns="0" tIns="0" rIns="0" bIns="0" rtlCol="0" anchor="ctr"/>
+          <a:lstStyle/>
+          <a:p>
+            <a:pPr algn="ctr" indent="0" marL="0">
+              <a:buNone/>
+            </a:pPr>
+            <a:r>
+              <a:rPr lang="en-US" sz="1050" dirty="0">
+                <a:solidFill>
+                  <a:schemeClr val="tx1"/>
+                </a:solidFill>
+              </a:rPr>
+              <a:t>Market-extension</a:t>
+            </a:r>
+            <a:endParaRPr lang="en-US" sz="1050" dirty="0"/>
+          </a:p>
+        </p:txBody>
+      </p:sp>
+      <p:sp>
+        <p:nvSpPr>
+          <p:cNvPr id="17" name="type4"/>
+          <p:cNvSpPr/>
+          <p:nvPr/>
+        </p:nvSpPr>
+        <p:spPr>
+          <a:xfrm>
+            <a:off x="3154680" y="2487168"/>
+            <a:ext cx="1280160" cy="365760"/>
+          </a:xfrm>
+          <a:prstGeom prst="roundRect">
+            <a:avLst>
+              <a:gd name="adj" fmla="val 50000"/>
+            </a:avLst>
+          </a:prstGeom>
+          <a:solidFill>
+            <a:srgbClr val="FFFFFF"/>
+          </a:solidFill>
+          <a:ln w="12700">
+            <a:solidFill>
+              <a:schemeClr val="accent1"/>
+            </a:solidFill>
+            <a:prstDash val="solid"/>
+          </a:ln>
+        </p:spPr>
+      </p:sp>
+      <p:sp>
+        <p:nvSpPr>
+          <p:cNvPr id="18" name="Text 16"/>
+          <p:cNvSpPr txBox="1"/>
+          <p:nvPr/>
+        </p:nvSpPr>
+        <p:spPr>
+          <a:xfrm>
+            <a:off x="3154680" y="2487168"/>
+            <a:ext cx="1280160" cy="365760"/>
+          </a:xfrm>
+          <a:prstGeom prst="rect">
+            <a:avLst/>
+          </a:prstGeom>
+          <a:noFill/>
+          <a:ln/>
+        </p:spPr>
+        <p:txBody>
+          <a:bodyPr wrap="square" lIns="0" tIns="0" rIns="0" bIns="0" rtlCol="0" anchor="ctr"/>
+          <a:lstStyle/>
+          <a:p>
+            <a:pPr algn="ctr" indent="0" marL="0">
+              <a:buNone/>
+            </a:pPr>
+            <a:r>
+              <a:rPr lang="en-US" sz="1050" dirty="0">
+                <a:solidFill>
+                  <a:schemeClr val="tx1"/>
+                </a:solidFill>
+              </a:rPr>
+              <a:t>Product-extension</a:t>
+            </a:r>
+            <a:endParaRPr lang="en-US" sz="1050" dirty="0"/>
+          </a:p>
+        </p:txBody>
+      </p:sp>
+      <p:sp>
+        <p:nvSpPr>
+          <p:cNvPr id="19" name="type5"/>
+          <p:cNvSpPr/>
+          <p:nvPr/>
+        </p:nvSpPr>
+        <p:spPr>
+          <a:xfrm>
+            <a:off x="4526280" y="2487168"/>
+            <a:ext cx="1280160" cy="365760"/>
+          </a:xfrm>
+          <a:prstGeom prst="roundRect">
+            <a:avLst>
+              <a:gd name="adj" fmla="val 50000"/>
+            </a:avLst>
+          </a:prstGeom>
+          <a:solidFill>
+            <a:srgbClr val="FFFFFF"/>
+          </a:solidFill>
+          <a:ln w="12700">
+            <a:solidFill>
+              <a:schemeClr val="accent1"/>
+            </a:solidFill>
+            <a:prstDash val="solid"/>
+          </a:ln>
+        </p:spPr>
+      </p:sp>
+      <p:sp>
+        <p:nvSpPr>
+          <p:cNvPr id="20" name="Text 18"/>
+          <p:cNvSpPr txBox="1"/>
+          <p:nvPr/>
+        </p:nvSpPr>
+        <p:spPr>
+          <a:xfrm>
+            <a:off x="4526280" y="2487168"/>
+            <a:ext cx="1280160" cy="365760"/>
+          </a:xfrm>
+          <a:prstGeom prst="rect">
+            <a:avLst/>
+          </a:prstGeom>
+          <a:noFill/>
+          <a:ln/>
+        </p:spPr>
+        <p:txBody>
+          <a:bodyPr wrap="square" lIns="0" tIns="0" rIns="0" bIns="0" rtlCol="0" anchor="ctr"/>
+          <a:lstStyle/>
+          <a:p>
+            <a:pPr algn="ctr" indent="0" marL="0">
+              <a:buNone/>
+            </a:pPr>
+            <a:r>
+              <a:rPr lang="en-US" sz="1050" dirty="0">
+                <a:solidFill>
+                  <a:schemeClr val="tx1"/>
+                </a:solidFill>
+              </a:rPr>
+              <a:t>Conglomerate</a:t>
+            </a:r>
+            <a:endParaRPr lang="en-US" sz="1050" dirty="0"/>
+          </a:p>
+        </p:txBody>
+      </p:sp>
+      <p:sp>
+        <p:nvSpPr>
+          <p:cNvPr id="21" name="Text 19"/>
+          <p:cNvSpPr txBox="1"/>
+          <p:nvPr/>
+        </p:nvSpPr>
+        <p:spPr>
+          <a:xfrm>
+            <a:off x="6080760" y="1234440"/>
+            <a:ext cx="2606040" cy="274320"/>
+          </a:xfrm>
+          <a:prstGeom prst="rect">
+            <a:avLst/>
+          </a:prstGeom>
+          <a:noFill/>
+          <a:ln/>
+        </p:spPr>
+        <p:txBody>
+          <a:bodyPr wrap="square" lIns="0" tIns="0" rIns="0" bIns="0" rtlCol="0" anchor="ctr"/>
+          <a:lstStyle/>
+          <a:p>
+            <a:pPr indent="0" marL="0">
+              <a:buNone/>
+            </a:pPr>
+            <a:r>
+              <a:rPr lang="en-US" sz="1300" b="1" dirty="0">
+                <a:solidFill>
+                  <a:schemeClr val="accent2"/>
+                </a:solidFill>
+              </a:rPr>
+              <a:t>Four ways to integrate</a:t>
+            </a:r>
+            <a:endParaRPr lang="en-US" sz="1300" dirty="0"/>
+          </a:p>
+        </p:txBody>
+      </p:sp>
+      <p:sp>
+        <p:nvSpPr>
+          <p:cNvPr id="22" name="intdot0"/>
+          <p:cNvSpPr/>
+          <p:nvPr/>
+        </p:nvSpPr>
+        <p:spPr>
+          <a:xfrm>
+            <a:off x="6080760" y="1636776"/>
+            <a:ext cx="182880" cy="182880"/>
+          </a:xfrm>
+          <a:prstGeom prst="ellipse">
+            <a:avLst/>
+          </a:prstGeom>
+          <a:solidFill>
             <a:schemeClr val="accent2"/>
           </a:solidFill>
           <a:ln/>
@@ -1874,14 +1914,14 @@
       </p:sp>
       <p:sp>
         <p:nvSpPr>
-          <p:cNvPr id="26" name="Text 24"/>
-          <p:cNvSpPr txBox="1"/>
-          <p:nvPr/>
-        </p:nvSpPr>
-        <p:spPr>
-          <a:xfrm>
-            <a:off x="6190488" y="1691640"/>
-            <a:ext cx="2386584" cy="566928"/>
+          <p:cNvPr id="23" name="Text 21"/>
+          <p:cNvSpPr txBox="1"/>
+          <p:nvPr/>
+        </p:nvSpPr>
+        <p:spPr>
+          <a:xfrm>
+            <a:off x="6355080" y="1572768"/>
+            <a:ext cx="2286000" cy="310896"/>
           </a:xfrm>
           <a:prstGeom prst="rect">
             <a:avLst/>
@@ -1897,61 +1937,336 @@
               <a:buNone/>
             </a:pPr>
             <a:r>
-              <a:rPr lang="en-US" sz="1500" b="1" dirty="0">
+              <a:rPr lang="en-US" sz="1200" dirty="0">
+                <a:solidFill>
+                  <a:schemeClr val="tx1"/>
+                </a:solidFill>
+              </a:rPr>
+              <a:t>Standalone</a:t>
+            </a:r>
+            <a:endParaRPr lang="en-US" sz="1200" dirty="0"/>
+          </a:p>
+        </p:txBody>
+      </p:sp>
+      <p:sp>
+        <p:nvSpPr>
+          <p:cNvPr id="24" name="intdot1"/>
+          <p:cNvSpPr/>
+          <p:nvPr/>
+        </p:nvSpPr>
+        <p:spPr>
+          <a:xfrm>
+            <a:off x="6080760" y="1984248"/>
+            <a:ext cx="182880" cy="182880"/>
+          </a:xfrm>
+          <a:prstGeom prst="ellipse">
+            <a:avLst/>
+          </a:prstGeom>
+          <a:solidFill>
+            <a:schemeClr val="accent2"/>
+          </a:solidFill>
+          <a:ln/>
+        </p:spPr>
+      </p:sp>
+      <p:sp>
+        <p:nvSpPr>
+          <p:cNvPr id="25" name="Text 23"/>
+          <p:cNvSpPr txBox="1"/>
+          <p:nvPr/>
+        </p:nvSpPr>
+        <p:spPr>
+          <a:xfrm>
+            <a:off x="6355080" y="1920240"/>
+            <a:ext cx="2286000" cy="310896"/>
+          </a:xfrm>
+          <a:prstGeom prst="rect">
+            <a:avLst/>
+          </a:prstGeom>
+          <a:noFill/>
+          <a:ln/>
+        </p:spPr>
+        <p:txBody>
+          <a:bodyPr wrap="square" lIns="0" tIns="0" rIns="0" bIns="0" rtlCol="0" anchor="ctr"/>
+          <a:lstStyle/>
+          <a:p>
+            <a:pPr indent="0" marL="0">
+              <a:buNone/>
+            </a:pPr>
+            <a:r>
+              <a:rPr lang="en-US" sz="1200" dirty="0">
+                <a:solidFill>
+                  <a:schemeClr val="tx1"/>
+                </a:solidFill>
+              </a:rPr>
+              <a:t>Targeted</a:t>
+            </a:r>
+            <a:endParaRPr lang="en-US" sz="1200" dirty="0"/>
+          </a:p>
+        </p:txBody>
+      </p:sp>
+      <p:sp>
+        <p:nvSpPr>
+          <p:cNvPr id="26" name="intdot2"/>
+          <p:cNvSpPr/>
+          <p:nvPr/>
+        </p:nvSpPr>
+        <p:spPr>
+          <a:xfrm>
+            <a:off x="6080760" y="2331720"/>
+            <a:ext cx="182880" cy="182880"/>
+          </a:xfrm>
+          <a:prstGeom prst="ellipse">
+            <a:avLst/>
+          </a:prstGeom>
+          <a:solidFill>
+            <a:schemeClr val="accent2"/>
+          </a:solidFill>
+          <a:ln/>
+        </p:spPr>
+      </p:sp>
+      <p:sp>
+        <p:nvSpPr>
+          <p:cNvPr id="27" name="Text 25"/>
+          <p:cNvSpPr txBox="1"/>
+          <p:nvPr/>
+        </p:nvSpPr>
+        <p:spPr>
+          <a:xfrm>
+            <a:off x="6355080" y="2267712"/>
+            <a:ext cx="2286000" cy="310896"/>
+          </a:xfrm>
+          <a:prstGeom prst="rect">
+            <a:avLst/>
+          </a:prstGeom>
+          <a:noFill/>
+          <a:ln/>
+        </p:spPr>
+        <p:txBody>
+          <a:bodyPr wrap="square" lIns="0" tIns="0" rIns="0" bIns="0" rtlCol="0" anchor="ctr"/>
+          <a:lstStyle/>
+          <a:p>
+            <a:pPr indent="0" marL="0">
+              <a:buNone/>
+            </a:pPr>
+            <a:r>
+              <a:rPr lang="en-US" sz="1200" dirty="0">
+                <a:solidFill>
+                  <a:schemeClr val="tx1"/>
+                </a:solidFill>
+              </a:rPr>
+              <a:t>Full</a:t>
+            </a:r>
+            <a:endParaRPr lang="en-US" sz="1200" dirty="0"/>
+          </a:p>
+        </p:txBody>
+      </p:sp>
+      <p:sp>
+        <p:nvSpPr>
+          <p:cNvPr id="28" name="intdot3"/>
+          <p:cNvSpPr/>
+          <p:nvPr/>
+        </p:nvSpPr>
+        <p:spPr>
+          <a:xfrm>
+            <a:off x="6080760" y="2679192"/>
+            <a:ext cx="182880" cy="182880"/>
+          </a:xfrm>
+          <a:prstGeom prst="ellipse">
+            <a:avLst/>
+          </a:prstGeom>
+          <a:solidFill>
+            <a:schemeClr val="accent2"/>
+          </a:solidFill>
+          <a:ln/>
+        </p:spPr>
+      </p:sp>
+      <p:sp>
+        <p:nvSpPr>
+          <p:cNvPr id="29" name="Text 27"/>
+          <p:cNvSpPr txBox="1"/>
+          <p:nvPr/>
+        </p:nvSpPr>
+        <p:spPr>
+          <a:xfrm>
+            <a:off x="6355080" y="2615184"/>
+            <a:ext cx="2286000" cy="310896"/>
+          </a:xfrm>
+          <a:prstGeom prst="rect">
+            <a:avLst/>
+          </a:prstGeom>
+          <a:noFill/>
+          <a:ln/>
+        </p:spPr>
+        <p:txBody>
+          <a:bodyPr wrap="square" lIns="0" tIns="0" rIns="0" bIns="0" rtlCol="0" anchor="ctr"/>
+          <a:lstStyle/>
+          <a:p>
+            <a:pPr indent="0" marL="0">
+              <a:buNone/>
+            </a:pPr>
+            <a:r>
+              <a:rPr lang="en-US" sz="1200" dirty="0">
+                <a:solidFill>
+                  <a:schemeClr val="tx1"/>
+                </a:solidFill>
+              </a:rPr>
+              <a:t>Functional</a:t>
+            </a:r>
+            <a:endParaRPr lang="en-US" sz="1200" dirty="0"/>
+          </a:p>
+        </p:txBody>
+      </p:sp>
+      <p:sp>
+        <p:nvSpPr>
+          <p:cNvPr id="30" name="Text 28"/>
+          <p:cNvSpPr txBox="1"/>
+          <p:nvPr/>
+        </p:nvSpPr>
+        <p:spPr>
+          <a:xfrm>
+            <a:off x="6080760" y="3017520"/>
+            <a:ext cx="2606040" cy="320040"/>
+          </a:xfrm>
+          <a:prstGeom prst="rect">
+            <a:avLst/>
+          </a:prstGeom>
+          <a:noFill/>
+          <a:ln/>
+        </p:spPr>
+        <p:txBody>
+          <a:bodyPr wrap="square" lIns="0" tIns="0" rIns="0" bIns="0" rtlCol="0" anchor="ctr"/>
+          <a:lstStyle/>
+          <a:p>
+            <a:pPr indent="0" marL="0">
+              <a:buNone/>
+            </a:pPr>
+            <a:r>
+              <a:rPr lang="en-US" sz="1300" b="1" dirty="0">
+                <a:solidFill>
+                  <a:schemeClr val="accent2"/>
+                </a:solidFill>
+              </a:rPr>
+              <a:t>Synergy  </a:t>
+            </a:r>
+            <a:pPr indent="0" marL="0">
+              <a:buNone/>
+            </a:pPr>
+            <a:r>
+              <a:rPr lang="en-US" sz="1300" b="1" dirty="0">
+                <a:solidFill>
+                  <a:schemeClr val="tx1"/>
+                </a:solidFill>
+              </a:rPr>
+              <a:t>1 + 1 &gt; 2</a:t>
+            </a:r>
+            <a:endParaRPr lang="en-US" sz="1300" dirty="0"/>
+          </a:p>
+        </p:txBody>
+      </p:sp>
+      <p:sp>
+        <p:nvSpPr>
+          <p:cNvPr id="31" name="stat"/>
+          <p:cNvSpPr/>
+          <p:nvPr/>
+        </p:nvSpPr>
+        <p:spPr>
+          <a:xfrm>
+            <a:off x="457200" y="3520440"/>
+            <a:ext cx="8229600" cy="685800"/>
+          </a:xfrm>
+          <a:prstGeom prst="roundRect">
+            <a:avLst>
+              <a:gd name="adj" fmla="val 13333"/>
+            </a:avLst>
+          </a:prstGeom>
+          <a:solidFill>
+            <a:schemeClr val="accent3"/>
+          </a:solidFill>
+          <a:ln/>
+        </p:spPr>
+      </p:sp>
+      <p:sp>
+        <p:nvSpPr>
+          <p:cNvPr id="32" name="Text 30"/>
+          <p:cNvSpPr txBox="1"/>
+          <p:nvPr/>
+        </p:nvSpPr>
+        <p:spPr>
+          <a:xfrm>
+            <a:off x="640080" y="3520440"/>
+            <a:ext cx="1554480" cy="685800"/>
+          </a:xfrm>
+          <a:prstGeom prst="rect">
+            <a:avLst/>
+          </a:prstGeom>
+          <a:noFill/>
+          <a:ln/>
+        </p:spPr>
+        <p:txBody>
+          <a:bodyPr wrap="square" lIns="0" tIns="0" rIns="0" bIns="0" rtlCol="0" anchor="ctr"/>
+          <a:lstStyle/>
+          <a:p>
+            <a:pPr indent="0" marL="0">
+              <a:buNone/>
+            </a:pPr>
+            <a:r>
+              <a:rPr lang="en-US" sz="2800" b="1" dirty="0">
                 <a:solidFill>
                   <a:srgbClr val="FFFFFF"/>
                 </a:solidFill>
               </a:rPr>
-              <a:t>SELL</a:t>
-            </a:r>
-            <a:endParaRPr lang="en-US" sz="1500" dirty="0"/>
-          </a:p>
-          <a:p>
-            <a:pPr indent="0" marL="0">
-              <a:buNone/>
-            </a:pPr>
-            <a:r>
-              <a:rPr lang="en-US" sz="1050" dirty="0">
+              <a:t>70–90%</a:t>
+            </a:r>
+            <a:endParaRPr lang="en-US" sz="2800" dirty="0"/>
+          </a:p>
+        </p:txBody>
+      </p:sp>
+      <p:sp>
+        <p:nvSpPr>
+          <p:cNvPr id="33" name="Text 31"/>
+          <p:cNvSpPr txBox="1"/>
+          <p:nvPr/>
+        </p:nvSpPr>
+        <p:spPr>
+          <a:xfrm>
+            <a:off x="2240280" y="3520440"/>
+            <a:ext cx="6309360" cy="685800"/>
+          </a:xfrm>
+          <a:prstGeom prst="rect">
+            <a:avLst/>
+          </a:prstGeom>
+          <a:noFill/>
+          <a:ln/>
+        </p:spPr>
+        <p:txBody>
+          <a:bodyPr wrap="square" lIns="0" tIns="0" rIns="0" bIns="0" rtlCol="0" anchor="ctr"/>
+          <a:lstStyle/>
+          <a:p>
+            <a:pPr indent="0" marL="0">
+              <a:buNone/>
+            </a:pPr>
+            <a:r>
+              <a:rPr lang="en-US" sz="1400" b="1" dirty="0">
                 <a:solidFill>
                   <a:srgbClr val="FFFFFF"/>
                 </a:solidFill>
               </a:rPr>
-              <a:t>Simplify and focus on the core</a:t>
-            </a:r>
-            <a:endParaRPr lang="en-US" sz="1500" dirty="0"/>
-          </a:p>
-        </p:txBody>
-      </p:sp>
-      <p:sp>
-        <p:nvSpPr>
-          <p:cNvPr id="27" name="yr20"/>
-          <p:cNvSpPr/>
-          <p:nvPr/>
-        </p:nvSpPr>
-        <p:spPr>
-          <a:xfrm>
-            <a:off x="6080760" y="2414016"/>
-            <a:ext cx="475488" cy="475488"/>
-          </a:xfrm>
-          <a:prstGeom prst="ellipse">
-            <a:avLst/>
-          </a:prstGeom>
-          <a:solidFill>
-            <a:schemeClr val="accent2"/>
-          </a:solidFill>
-          <a:ln/>
-        </p:spPr>
-      </p:sp>
-      <p:sp>
-        <p:nvSpPr>
-          <p:cNvPr id="28" name="Text 26"/>
-          <p:cNvSpPr txBox="1"/>
-          <p:nvPr/>
-        </p:nvSpPr>
-        <p:spPr>
-          <a:xfrm>
-            <a:off x="6080760" y="2414016"/>
-            <a:ext cx="475488" cy="475488"/>
+              <a:t>of M&amp;A deals fail, mostly because integration is hard</a:t>
+            </a:r>
+            <a:endParaRPr lang="en-US" sz="1400" dirty="0"/>
+          </a:p>
+        </p:txBody>
+      </p:sp>
+      <p:sp>
+        <p:nvSpPr>
+          <p:cNvPr id="34" name="Text 32"/>
+          <p:cNvSpPr txBox="1"/>
+          <p:nvPr/>
+        </p:nvSpPr>
+        <p:spPr>
+          <a:xfrm>
+            <a:off x="457200" y="4297680"/>
+            <a:ext cx="8229600" cy="320040"/>
           </a:xfrm>
           <a:prstGeom prst="rect">
             <a:avLst/>
@@ -1963,316 +2278,54 @@
           <a:bodyPr wrap="square" lIns="0" tIns="0" rIns="0" bIns="0" rtlCol="0" anchor="ctr"/>
           <a:lstStyle/>
           <a:p>
-            <a:pPr algn="ctr" indent="0" marL="0">
-              <a:buNone/>
-            </a:pPr>
-            <a:r>
-              <a:rPr lang="en-US" sz="1000" b="1" dirty="0">
-                <a:solidFill>
-                  <a:srgbClr val="FFFFFF"/>
-                </a:solidFill>
-              </a:rPr>
-              <a:t>2023</a:t>
-            </a:r>
-            <a:endParaRPr lang="en-US" sz="1000" dirty="0"/>
-          </a:p>
-        </p:txBody>
-      </p:sp>
-      <p:sp>
-        <p:nvSpPr>
-          <p:cNvPr id="29" name="Text 27"/>
-          <p:cNvSpPr txBox="1"/>
-          <p:nvPr/>
-        </p:nvSpPr>
-        <p:spPr>
-          <a:xfrm>
-            <a:off x="6629400" y="2377440"/>
-            <a:ext cx="2057400" cy="603504"/>
-          </a:xfrm>
-          <a:prstGeom prst="rect">
-            <a:avLst/>
-          </a:prstGeom>
-          <a:noFill/>
-          <a:ln/>
-        </p:spPr>
-        <p:txBody>
-          <a:bodyPr wrap="square" lIns="0" tIns="0" rIns="0" bIns="0" rtlCol="0" anchor="t"/>
-          <a:lstStyle/>
-          <a:p>
-            <a:pPr indent="0" marL="0">
-              <a:buNone/>
-            </a:pPr>
-            <a:r>
-              <a:rPr lang="en-US" sz="1250" b="1" dirty="0">
-                <a:solidFill>
-                  <a:schemeClr val="tx1"/>
-                </a:solidFill>
-              </a:rPr>
-              <a:t>Dollar Shave Club</a:t>
-            </a:r>
-            <a:endParaRPr lang="en-US" sz="1250" dirty="0"/>
-          </a:p>
-          <a:p>
-            <a:pPr indent="0" marL="0">
-              <a:buNone/>
-            </a:pPr>
-            <a:r>
-              <a:rPr lang="en-US" sz="1050" dirty="0">
+            <a:pPr indent="0" marL="0">
+              <a:buNone/>
+            </a:pPr>
+            <a:r>
+              <a:rPr lang="en-US" sz="1300" i="1" dirty="0">
+                <a:solidFill>
+                  <a:schemeClr val="tx2"/>
+                </a:solidFill>
+              </a:rPr>
+              <a:t>Cross-border M&amp;A is one form of FDI (the other is greenfield).</a:t>
+            </a:r>
+            <a:endParaRPr lang="en-US" sz="1300" dirty="0"/>
+          </a:p>
+        </p:txBody>
+      </p:sp>
+      <p:sp>
+        <p:nvSpPr>
+          <p:cNvPr id="35" name="Text 33"/>
+          <p:cNvSpPr txBox="1"/>
+          <p:nvPr/>
+        </p:nvSpPr>
+        <p:spPr>
+          <a:xfrm>
+            <a:off x="457200" y="4709160"/>
+            <a:ext cx="8229600" cy="274320"/>
+          </a:xfrm>
+          <a:prstGeom prst="rect">
+            <a:avLst/>
+          </a:prstGeom>
+          <a:noFill/>
+          <a:ln/>
+        </p:spPr>
+        <p:txBody>
+          <a:bodyPr wrap="square" lIns="0" tIns="0" rIns="0" bIns="0" rtlCol="0" anchor="ctr"/>
+          <a:lstStyle/>
+          <a:p>
+            <a:pPr indent="0" marL="0">
+              <a:buNone/>
+            </a:pPr>
+            <a:r>
+              <a:rPr lang="en-US" sz="850" dirty="0">
                 <a:solidFill>
                   <a:schemeClr val="accent4"/>
                 </a:solidFill>
               </a:rPr>
-              <a:t>majority stake sold</a:t>
-            </a:r>
-            <a:endParaRPr lang="en-US" sz="1250" dirty="0"/>
-          </a:p>
-        </p:txBody>
-      </p:sp>
-      <p:sp>
-        <p:nvSpPr>
-          <p:cNvPr id="30" name="yr21"/>
-          <p:cNvSpPr/>
-          <p:nvPr/>
-        </p:nvSpPr>
-        <p:spPr>
-          <a:xfrm>
-            <a:off x="6080760" y="3127248"/>
-            <a:ext cx="475488" cy="475488"/>
-          </a:xfrm>
-          <a:prstGeom prst="ellipse">
-            <a:avLst/>
-          </a:prstGeom>
-          <a:solidFill>
-            <a:schemeClr val="accent2"/>
-          </a:solidFill>
-          <a:ln/>
-        </p:spPr>
-      </p:sp>
-      <p:sp>
-        <p:nvSpPr>
-          <p:cNvPr id="31" name="Text 29"/>
-          <p:cNvSpPr txBox="1"/>
-          <p:nvPr/>
-        </p:nvSpPr>
-        <p:spPr>
-          <a:xfrm>
-            <a:off x="6080760" y="3127248"/>
-            <a:ext cx="475488" cy="475488"/>
-          </a:xfrm>
-          <a:prstGeom prst="rect">
-            <a:avLst/>
-          </a:prstGeom>
-          <a:noFill/>
-          <a:ln/>
-        </p:spPr>
-        <p:txBody>
-          <a:bodyPr wrap="square" lIns="0" tIns="0" rIns="0" bIns="0" rtlCol="0" anchor="ctr"/>
-          <a:lstStyle/>
-          <a:p>
-            <a:pPr algn="ctr" indent="0" marL="0">
-              <a:buNone/>
-            </a:pPr>
-            <a:r>
-              <a:rPr lang="en-US" sz="1000" b="1" dirty="0">
-                <a:solidFill>
-                  <a:srgbClr val="FFFFFF"/>
-                </a:solidFill>
-              </a:rPr>
-              <a:t>2025</a:t>
-            </a:r>
-            <a:endParaRPr lang="en-US" sz="1000" dirty="0"/>
-          </a:p>
-        </p:txBody>
-      </p:sp>
-      <p:sp>
-        <p:nvSpPr>
-          <p:cNvPr id="32" name="Text 30"/>
-          <p:cNvSpPr txBox="1"/>
-          <p:nvPr/>
-        </p:nvSpPr>
-        <p:spPr>
-          <a:xfrm>
-            <a:off x="6629400" y="3090672"/>
-            <a:ext cx="2057400" cy="603504"/>
-          </a:xfrm>
-          <a:prstGeom prst="rect">
-            <a:avLst/>
-          </a:prstGeom>
-          <a:noFill/>
-          <a:ln/>
-        </p:spPr>
-        <p:txBody>
-          <a:bodyPr wrap="square" lIns="0" tIns="0" rIns="0" bIns="0" rtlCol="0" anchor="t"/>
-          <a:lstStyle/>
-          <a:p>
-            <a:pPr indent="0" marL="0">
-              <a:buNone/>
-            </a:pPr>
-            <a:r>
-              <a:rPr lang="en-US" sz="1250" b="1" dirty="0">
-                <a:solidFill>
-                  <a:schemeClr val="tx1"/>
-                </a:solidFill>
-              </a:rPr>
-              <a:t>Ice cream → Magnum</a:t>
-            </a:r>
-            <a:endParaRPr lang="en-US" sz="1250" dirty="0"/>
-          </a:p>
-          <a:p>
-            <a:pPr indent="0" marL="0">
-              <a:buNone/>
-            </a:pPr>
-            <a:r>
-              <a:rPr lang="en-US" sz="1050" dirty="0">
-                <a:solidFill>
-                  <a:schemeClr val="accent4"/>
-                </a:solidFill>
-              </a:rPr>
-              <a:t>demerged and listed</a:t>
-            </a:r>
-            <a:endParaRPr lang="en-US" sz="1250" dirty="0"/>
-          </a:p>
-        </p:txBody>
-      </p:sp>
-      <p:sp>
-        <p:nvSpPr>
-          <p:cNvPr id="33" name="yr22"/>
-          <p:cNvSpPr/>
-          <p:nvPr/>
-        </p:nvSpPr>
-        <p:spPr>
-          <a:xfrm>
-            <a:off x="6080760" y="3840480"/>
-            <a:ext cx="475488" cy="475488"/>
-          </a:xfrm>
-          <a:prstGeom prst="ellipse">
-            <a:avLst/>
-          </a:prstGeom>
-          <a:solidFill>
-            <a:schemeClr val="accent2"/>
-          </a:solidFill>
-          <a:ln/>
-        </p:spPr>
-      </p:sp>
-      <p:sp>
-        <p:nvSpPr>
-          <p:cNvPr id="34" name="Text 32"/>
-          <p:cNvSpPr txBox="1"/>
-          <p:nvPr/>
-        </p:nvSpPr>
-        <p:spPr>
-          <a:xfrm>
-            <a:off x="6080760" y="3840480"/>
-            <a:ext cx="475488" cy="475488"/>
-          </a:xfrm>
-          <a:prstGeom prst="rect">
-            <a:avLst/>
-          </a:prstGeom>
-          <a:noFill/>
-          <a:ln/>
-        </p:spPr>
-        <p:txBody>
-          <a:bodyPr wrap="square" lIns="0" tIns="0" rIns="0" bIns="0" rtlCol="0" anchor="ctr"/>
-          <a:lstStyle/>
-          <a:p>
-            <a:pPr algn="ctr" indent="0" marL="0">
-              <a:buNone/>
-            </a:pPr>
-            <a:r>
-              <a:rPr lang="en-US" sz="1000" b="1" dirty="0">
-                <a:solidFill>
-                  <a:srgbClr val="FFFFFF"/>
-                </a:solidFill>
-              </a:rPr>
-              <a:t>2026</a:t>
-            </a:r>
-            <a:endParaRPr lang="en-US" sz="1000" dirty="0"/>
-          </a:p>
-        </p:txBody>
-      </p:sp>
-      <p:sp>
-        <p:nvSpPr>
-          <p:cNvPr id="35" name="Text 33"/>
-          <p:cNvSpPr txBox="1"/>
-          <p:nvPr/>
-        </p:nvSpPr>
-        <p:spPr>
-          <a:xfrm>
-            <a:off x="6629400" y="3803904"/>
-            <a:ext cx="2057400" cy="603504"/>
-          </a:xfrm>
-          <a:prstGeom prst="rect">
-            <a:avLst/>
-          </a:prstGeom>
-          <a:noFill/>
-          <a:ln/>
-        </p:spPr>
-        <p:txBody>
-          <a:bodyPr wrap="square" lIns="0" tIns="0" rIns="0" bIns="0" rtlCol="0" anchor="t"/>
-          <a:lstStyle/>
-          <a:p>
-            <a:pPr indent="0" marL="0">
-              <a:buNone/>
-            </a:pPr>
-            <a:r>
-              <a:rPr lang="en-US" sz="1250" b="1" dirty="0">
-                <a:solidFill>
-                  <a:schemeClr val="tx1"/>
-                </a:solidFill>
-              </a:rPr>
-              <a:t>Food → McCormick</a:t>
-            </a:r>
-            <a:endParaRPr lang="en-US" sz="1250" dirty="0"/>
-          </a:p>
-          <a:p>
-            <a:pPr indent="0" marL="0">
-              <a:buNone/>
-            </a:pPr>
-            <a:r>
-              <a:rPr lang="en-US" sz="1050" dirty="0">
-                <a:solidFill>
-                  <a:schemeClr val="accent4"/>
-                </a:solidFill>
-              </a:rPr>
-              <a:t>$44.8bn, announced; close expected 2027</a:t>
-            </a:r>
-            <a:endParaRPr lang="en-US" sz="1250" dirty="0"/>
-          </a:p>
-        </p:txBody>
-      </p:sp>
-      <p:sp>
-        <p:nvSpPr>
-          <p:cNvPr id="36" name="Text 34"/>
-          <p:cNvSpPr txBox="1"/>
-          <p:nvPr/>
-        </p:nvSpPr>
-        <p:spPr>
-          <a:xfrm>
-            <a:off x="457200" y="4663440"/>
-            <a:ext cx="8229600" cy="320040"/>
-          </a:xfrm>
-          <a:prstGeom prst="rect">
-            <a:avLst/>
-          </a:prstGeom>
-          <a:noFill/>
-          <a:ln/>
-        </p:spPr>
-        <p:txBody>
-          <a:bodyPr wrap="square" lIns="0" tIns="0" rIns="0" bIns="0" rtlCol="0" anchor="ctr"/>
-          <a:lstStyle/>
-          <a:p>
-            <a:pPr indent="0" marL="0">
-              <a:buNone/>
-            </a:pPr>
-            <a:r>
-              <a:rPr lang="en-US" sz="800" dirty="0">
-                <a:solidFill>
-                  <a:schemeClr val="accent4"/>
-                </a:solidFill>
-              </a:rPr>
-              <a:t>Sources: CNN (2000); UPI (2000); Fortune (2016); NBC News (2017); CHEManager (2022); Retail Dive (2023); MarketScreener (2025); NJBIZ (2026).</a:t>
-            </a:r>
-            <a:endParaRPr lang="en-US" sz="800" dirty="0"/>
+              <a:t>Sources: University of Greenwich (2026); Christensen et al. (2011).</a:t>
+            </a:r>
+            <a:endParaRPr lang="en-US" sz="850" dirty="0"/>
           </a:p>
         </p:txBody>
       </p:sp>
@@ -2333,6 +2386,1263 @@
                   <a:schemeClr val="tx2"/>
                 </a:solidFill>
               </a:rPr>
+              <a:t>Unilever M&amp;A: from buying to selling</a:t>
+            </a:r>
+            <a:endParaRPr lang="en-US" sz="2800" dirty="0"/>
+          </a:p>
+        </p:txBody>
+      </p:sp>
+      <p:sp>
+        <p:nvSpPr>
+          <p:cNvPr id="3" name="Text 1"/>
+          <p:cNvSpPr txBox="1"/>
+          <p:nvPr/>
+        </p:nvSpPr>
+        <p:spPr>
+          <a:xfrm>
+            <a:off x="457200" y="804672"/>
+            <a:ext cx="8229600" cy="274320"/>
+          </a:xfrm>
+          <a:prstGeom prst="rect">
+            <a:avLst/>
+          </a:prstGeom>
+          <a:noFill/>
+          <a:ln/>
+        </p:spPr>
+        <p:txBody>
+          <a:bodyPr wrap="square" lIns="0" tIns="0" rIns="0" bIns="0" rtlCol="0" anchor="ctr"/>
+          <a:lstStyle/>
+          <a:p>
+            <a:pPr indent="0" marL="0">
+              <a:buNone/>
+            </a:pPr>
+            <a:r>
+              <a:rPr lang="en-US" sz="1300" i="1" dirty="0">
+                <a:solidFill>
+                  <a:schemeClr val="tx1"/>
+                </a:solidFill>
+              </a:rPr>
+              <a:t>Twenty years of growth by acquisition, then a turn to focus</a:t>
+            </a:r>
+            <a:endParaRPr lang="en-US" sz="1300" dirty="0"/>
+          </a:p>
+        </p:txBody>
+      </p:sp>
+      <p:sp>
+        <p:nvSpPr>
+          <p:cNvPr id="4" name="born"/>
+          <p:cNvSpPr/>
+          <p:nvPr/>
+        </p:nvSpPr>
+        <p:spPr>
+          <a:xfrm>
+            <a:off x="457200" y="1188720"/>
+            <a:ext cx="8229600" cy="347472"/>
+          </a:xfrm>
+          <a:prstGeom prst="roundRect">
+            <a:avLst>
+              <a:gd name="adj" fmla="val 21053"/>
+            </a:avLst>
+          </a:prstGeom>
+          <a:solidFill>
+            <a:schemeClr val="bg2"/>
+          </a:solidFill>
+          <a:ln/>
+        </p:spPr>
+      </p:sp>
+      <p:sp>
+        <p:nvSpPr>
+          <p:cNvPr id="5" name="Text 3"/>
+          <p:cNvSpPr txBox="1"/>
+          <p:nvPr/>
+        </p:nvSpPr>
+        <p:spPr>
+          <a:xfrm>
+            <a:off x="594360" y="1188720"/>
+            <a:ext cx="7955280" cy="347472"/>
+          </a:xfrm>
+          <a:prstGeom prst="rect">
+            <a:avLst/>
+          </a:prstGeom>
+          <a:noFill/>
+          <a:ln/>
+        </p:spPr>
+        <p:txBody>
+          <a:bodyPr wrap="square" lIns="0" tIns="0" rIns="0" bIns="0" rtlCol="0" anchor="ctr"/>
+          <a:lstStyle/>
+          <a:p>
+            <a:pPr indent="0" marL="0">
+              <a:buNone/>
+            </a:pPr>
+            <a:r>
+              <a:rPr lang="en-US" sz="1200" b="1" dirty="0">
+                <a:solidFill>
+                  <a:schemeClr val="tx1"/>
+                </a:solidFill>
+              </a:rPr>
+              <a:t>1929 · Born from a merger: Lever Brothers (UK) + Margarine Unie (NL)</a:t>
+            </a:r>
+            <a:endParaRPr lang="en-US" sz="1200" dirty="0"/>
+          </a:p>
+        </p:txBody>
+      </p:sp>
+      <p:sp>
+        <p:nvSpPr>
+          <p:cNvPr id="6" name="phase0"/>
+          <p:cNvSpPr/>
+          <p:nvPr/>
+        </p:nvSpPr>
+        <p:spPr>
+          <a:xfrm>
+            <a:off x="457200" y="1691640"/>
+            <a:ext cx="2606040" cy="566928"/>
+          </a:xfrm>
+          <a:prstGeom prst="roundRect">
+            <a:avLst>
+              <a:gd name="adj" fmla="val 12903"/>
+            </a:avLst>
+          </a:prstGeom>
+          <a:solidFill>
+            <a:schemeClr val="accent1"/>
+          </a:solidFill>
+          <a:ln/>
+        </p:spPr>
+      </p:sp>
+      <p:sp>
+        <p:nvSpPr>
+          <p:cNvPr id="7" name="Text 5"/>
+          <p:cNvSpPr txBox="1"/>
+          <p:nvPr/>
+        </p:nvSpPr>
+        <p:spPr>
+          <a:xfrm>
+            <a:off x="566928" y="1691640"/>
+            <a:ext cx="2386584" cy="566928"/>
+          </a:xfrm>
+          <a:prstGeom prst="rect">
+            <a:avLst/>
+          </a:prstGeom>
+          <a:noFill/>
+          <a:ln/>
+        </p:spPr>
+        <p:txBody>
+          <a:bodyPr wrap="square" lIns="0" tIns="0" rIns="0" bIns="0" rtlCol="0" anchor="ctr"/>
+          <a:lstStyle/>
+          <a:p>
+            <a:pPr indent="0" marL="0">
+              <a:buNone/>
+            </a:pPr>
+            <a:r>
+              <a:rPr lang="en-US" sz="1500" b="1" dirty="0">
+                <a:solidFill>
+                  <a:srgbClr val="FFFFFF"/>
+                </a:solidFill>
+              </a:rPr>
+              <a:t>BUY</a:t>
+            </a:r>
+            <a:endParaRPr lang="en-US" sz="1500" dirty="0"/>
+          </a:p>
+          <a:p>
+            <a:pPr indent="0" marL="0">
+              <a:buNone/>
+            </a:pPr>
+            <a:r>
+              <a:rPr lang="en-US" sz="1050" dirty="0">
+                <a:solidFill>
+                  <a:srgbClr val="FFFFFF"/>
+                </a:solidFill>
+              </a:rPr>
+              <a:t>Grow and enter new markets</a:t>
+            </a:r>
+            <a:endParaRPr lang="en-US" sz="1500" dirty="0"/>
+          </a:p>
+        </p:txBody>
+      </p:sp>
+      <p:sp>
+        <p:nvSpPr>
+          <p:cNvPr id="8" name="yr00"/>
+          <p:cNvSpPr/>
+          <p:nvPr/>
+        </p:nvSpPr>
+        <p:spPr>
+          <a:xfrm>
+            <a:off x="457200" y="2414016"/>
+            <a:ext cx="475488" cy="475488"/>
+          </a:xfrm>
+          <a:prstGeom prst="ellipse">
+            <a:avLst/>
+          </a:prstGeom>
+          <a:solidFill>
+            <a:schemeClr val="accent1"/>
+          </a:solidFill>
+          <a:ln/>
+        </p:spPr>
+      </p:sp>
+      <p:sp>
+        <p:nvSpPr>
+          <p:cNvPr id="9" name="Text 7"/>
+          <p:cNvSpPr txBox="1"/>
+          <p:nvPr/>
+        </p:nvSpPr>
+        <p:spPr>
+          <a:xfrm>
+            <a:off x="457200" y="2414016"/>
+            <a:ext cx="475488" cy="475488"/>
+          </a:xfrm>
+          <a:prstGeom prst="rect">
+            <a:avLst/>
+          </a:prstGeom>
+          <a:noFill/>
+          <a:ln/>
+        </p:spPr>
+        <p:txBody>
+          <a:bodyPr wrap="square" lIns="0" tIns="0" rIns="0" bIns="0" rtlCol="0" anchor="ctr"/>
+          <a:lstStyle/>
+          <a:p>
+            <a:pPr algn="ctr" indent="0" marL="0">
+              <a:buNone/>
+            </a:pPr>
+            <a:r>
+              <a:rPr lang="en-US" sz="1000" b="1" dirty="0">
+                <a:solidFill>
+                  <a:srgbClr val="FFFFFF"/>
+                </a:solidFill>
+              </a:rPr>
+              <a:t>2000</a:t>
+            </a:r>
+            <a:endParaRPr lang="en-US" sz="1000" dirty="0"/>
+          </a:p>
+        </p:txBody>
+      </p:sp>
+      <p:sp>
+        <p:nvSpPr>
+          <p:cNvPr id="10" name="Text 8"/>
+          <p:cNvSpPr txBox="1"/>
+          <p:nvPr/>
+        </p:nvSpPr>
+        <p:spPr>
+          <a:xfrm>
+            <a:off x="1005840" y="2377440"/>
+            <a:ext cx="2057400" cy="603504"/>
+          </a:xfrm>
+          <a:prstGeom prst="rect">
+            <a:avLst/>
+          </a:prstGeom>
+          <a:noFill/>
+          <a:ln/>
+        </p:spPr>
+        <p:txBody>
+          <a:bodyPr wrap="square" lIns="0" tIns="0" rIns="0" bIns="0" rtlCol="0" anchor="t"/>
+          <a:lstStyle/>
+          <a:p>
+            <a:pPr indent="0" marL="0">
+              <a:buNone/>
+            </a:pPr>
+            <a:r>
+              <a:rPr lang="en-US" sz="1250" b="1" dirty="0">
+                <a:solidFill>
+                  <a:schemeClr val="tx1"/>
+                </a:solidFill>
+              </a:rPr>
+              <a:t>Bestfoods</a:t>
+            </a:r>
+            <a:endParaRPr lang="en-US" sz="1250" dirty="0"/>
+          </a:p>
+          <a:p>
+            <a:pPr indent="0" marL="0">
+              <a:buNone/>
+            </a:pPr>
+            <a:r>
+              <a:rPr lang="en-US" sz="1050" dirty="0">
+                <a:solidFill>
+                  <a:schemeClr val="accent4"/>
+                </a:solidFill>
+              </a:rPr>
+              <a:t>$24.3bn · Knorr, Hellmann's</a:t>
+            </a:r>
+            <a:endParaRPr lang="en-US" sz="1250" dirty="0"/>
+          </a:p>
+        </p:txBody>
+      </p:sp>
+      <p:sp>
+        <p:nvSpPr>
+          <p:cNvPr id="11" name="yr01"/>
+          <p:cNvSpPr/>
+          <p:nvPr/>
+        </p:nvSpPr>
+        <p:spPr>
+          <a:xfrm>
+            <a:off x="457200" y="3127248"/>
+            <a:ext cx="475488" cy="475488"/>
+          </a:xfrm>
+          <a:prstGeom prst="ellipse">
+            <a:avLst/>
+          </a:prstGeom>
+          <a:solidFill>
+            <a:schemeClr val="accent1"/>
+          </a:solidFill>
+          <a:ln/>
+        </p:spPr>
+      </p:sp>
+      <p:sp>
+        <p:nvSpPr>
+          <p:cNvPr id="12" name="Text 10"/>
+          <p:cNvSpPr txBox="1"/>
+          <p:nvPr/>
+        </p:nvSpPr>
+        <p:spPr>
+          <a:xfrm>
+            <a:off x="457200" y="3127248"/>
+            <a:ext cx="475488" cy="475488"/>
+          </a:xfrm>
+          <a:prstGeom prst="rect">
+            <a:avLst/>
+          </a:prstGeom>
+          <a:noFill/>
+          <a:ln/>
+        </p:spPr>
+        <p:txBody>
+          <a:bodyPr wrap="square" lIns="0" tIns="0" rIns="0" bIns="0" rtlCol="0" anchor="ctr"/>
+          <a:lstStyle/>
+          <a:p>
+            <a:pPr algn="ctr" indent="0" marL="0">
+              <a:buNone/>
+            </a:pPr>
+            <a:r>
+              <a:rPr lang="en-US" sz="1000" b="1" dirty="0">
+                <a:solidFill>
+                  <a:srgbClr val="FFFFFF"/>
+                </a:solidFill>
+              </a:rPr>
+              <a:t>2000</a:t>
+            </a:r>
+            <a:endParaRPr lang="en-US" sz="1000" dirty="0"/>
+          </a:p>
+        </p:txBody>
+      </p:sp>
+      <p:sp>
+        <p:nvSpPr>
+          <p:cNvPr id="13" name="Text 11"/>
+          <p:cNvSpPr txBox="1"/>
+          <p:nvPr/>
+        </p:nvSpPr>
+        <p:spPr>
+          <a:xfrm>
+            <a:off x="1005840" y="3090672"/>
+            <a:ext cx="2057400" cy="603504"/>
+          </a:xfrm>
+          <a:prstGeom prst="rect">
+            <a:avLst/>
+          </a:prstGeom>
+          <a:noFill/>
+          <a:ln/>
+        </p:spPr>
+        <p:txBody>
+          <a:bodyPr wrap="square" lIns="0" tIns="0" rIns="0" bIns="0" rtlCol="0" anchor="t"/>
+          <a:lstStyle/>
+          <a:p>
+            <a:pPr indent="0" marL="0">
+              <a:buNone/>
+            </a:pPr>
+            <a:r>
+              <a:rPr lang="en-US" sz="1250" b="1" dirty="0">
+                <a:solidFill>
+                  <a:schemeClr val="tx1"/>
+                </a:solidFill>
+              </a:rPr>
+              <a:t>Ben &amp; Jerry's</a:t>
+            </a:r>
+            <a:endParaRPr lang="en-US" sz="1250" dirty="0"/>
+          </a:p>
+          <a:p>
+            <a:pPr indent="0" marL="0">
+              <a:buNone/>
+            </a:pPr>
+            <a:r>
+              <a:rPr lang="en-US" sz="1050" dirty="0">
+                <a:solidFill>
+                  <a:schemeClr val="accent4"/>
+                </a:solidFill>
+              </a:rPr>
+              <a:t>$326m · standalone, own board</a:t>
+            </a:r>
+            <a:endParaRPr lang="en-US" sz="1250" dirty="0"/>
+          </a:p>
+        </p:txBody>
+      </p:sp>
+      <p:sp>
+        <p:nvSpPr>
+          <p:cNvPr id="14" name="yr02"/>
+          <p:cNvSpPr/>
+          <p:nvPr/>
+        </p:nvSpPr>
+        <p:spPr>
+          <a:xfrm>
+            <a:off x="457200" y="3840480"/>
+            <a:ext cx="475488" cy="475488"/>
+          </a:xfrm>
+          <a:prstGeom prst="ellipse">
+            <a:avLst/>
+          </a:prstGeom>
+          <a:solidFill>
+            <a:schemeClr val="accent1"/>
+          </a:solidFill>
+          <a:ln/>
+        </p:spPr>
+      </p:sp>
+      <p:sp>
+        <p:nvSpPr>
+          <p:cNvPr id="15" name="Text 13"/>
+          <p:cNvSpPr txBox="1"/>
+          <p:nvPr/>
+        </p:nvSpPr>
+        <p:spPr>
+          <a:xfrm>
+            <a:off x="457200" y="3840480"/>
+            <a:ext cx="475488" cy="475488"/>
+          </a:xfrm>
+          <a:prstGeom prst="rect">
+            <a:avLst/>
+          </a:prstGeom>
+          <a:noFill/>
+          <a:ln/>
+        </p:spPr>
+        <p:txBody>
+          <a:bodyPr wrap="square" lIns="0" tIns="0" rIns="0" bIns="0" rtlCol="0" anchor="ctr"/>
+          <a:lstStyle/>
+          <a:p>
+            <a:pPr algn="ctr" indent="0" marL="0">
+              <a:buNone/>
+            </a:pPr>
+            <a:r>
+              <a:rPr lang="en-US" sz="1000" b="1" dirty="0">
+                <a:solidFill>
+                  <a:srgbClr val="FFFFFF"/>
+                </a:solidFill>
+              </a:rPr>
+              <a:t>2016</a:t>
+            </a:r>
+            <a:endParaRPr lang="en-US" sz="1000" dirty="0"/>
+          </a:p>
+        </p:txBody>
+      </p:sp>
+      <p:sp>
+        <p:nvSpPr>
+          <p:cNvPr id="16" name="Text 14"/>
+          <p:cNvSpPr txBox="1"/>
+          <p:nvPr/>
+        </p:nvSpPr>
+        <p:spPr>
+          <a:xfrm>
+            <a:off x="1005840" y="3803904"/>
+            <a:ext cx="2057400" cy="603504"/>
+          </a:xfrm>
+          <a:prstGeom prst="rect">
+            <a:avLst/>
+          </a:prstGeom>
+          <a:noFill/>
+          <a:ln/>
+        </p:spPr>
+        <p:txBody>
+          <a:bodyPr wrap="square" lIns="0" tIns="0" rIns="0" bIns="0" rtlCol="0" anchor="t"/>
+          <a:lstStyle/>
+          <a:p>
+            <a:pPr indent="0" marL="0">
+              <a:buNone/>
+            </a:pPr>
+            <a:r>
+              <a:rPr lang="en-US" sz="1250" b="1" dirty="0">
+                <a:solidFill>
+                  <a:schemeClr val="tx1"/>
+                </a:solidFill>
+              </a:rPr>
+              <a:t>Dollar Shave Club</a:t>
+            </a:r>
+            <a:endParaRPr lang="en-US" sz="1250" dirty="0"/>
+          </a:p>
+          <a:p>
+            <a:pPr indent="0" marL="0">
+              <a:buNone/>
+            </a:pPr>
+            <a:r>
+              <a:rPr lang="en-US" sz="1050" dirty="0">
+                <a:solidFill>
+                  <a:schemeClr val="accent4"/>
+                </a:solidFill>
+              </a:rPr>
+              <a:t>~$1bn · online direct-to-consumer</a:t>
+            </a:r>
+            <a:endParaRPr lang="en-US" sz="1250" dirty="0"/>
+          </a:p>
+        </p:txBody>
+      </p:sp>
+      <p:sp>
+        <p:nvSpPr>
+          <p:cNvPr id="17" name="phase1"/>
+          <p:cNvSpPr/>
+          <p:nvPr/>
+        </p:nvSpPr>
+        <p:spPr>
+          <a:xfrm>
+            <a:off x="3268980" y="1691640"/>
+            <a:ext cx="2606040" cy="566928"/>
+          </a:xfrm>
+          <a:prstGeom prst="roundRect">
+            <a:avLst>
+              <a:gd name="adj" fmla="val 12903"/>
+            </a:avLst>
+          </a:prstGeom>
+          <a:solidFill>
+            <a:schemeClr val="accent3"/>
+          </a:solidFill>
+          <a:ln/>
+        </p:spPr>
+      </p:sp>
+      <p:sp>
+        <p:nvSpPr>
+          <p:cNvPr id="18" name="Text 16"/>
+          <p:cNvSpPr txBox="1"/>
+          <p:nvPr/>
+        </p:nvSpPr>
+        <p:spPr>
+          <a:xfrm>
+            <a:off x="3378708" y="1691640"/>
+            <a:ext cx="2386584" cy="566928"/>
+          </a:xfrm>
+          <a:prstGeom prst="rect">
+            <a:avLst/>
+          </a:prstGeom>
+          <a:noFill/>
+          <a:ln/>
+        </p:spPr>
+        <p:txBody>
+          <a:bodyPr wrap="square" lIns="0" tIns="0" rIns="0" bIns="0" rtlCol="0" anchor="ctr"/>
+          <a:lstStyle/>
+          <a:p>
+            <a:pPr indent="0" marL="0">
+              <a:buNone/>
+            </a:pPr>
+            <a:r>
+              <a:rPr lang="en-US" sz="1500" b="1" dirty="0">
+                <a:solidFill>
+                  <a:srgbClr val="FFFFFF"/>
+                </a:solidFill>
+              </a:rPr>
+              <a:t>TURNING POINT</a:t>
+            </a:r>
+            <a:endParaRPr lang="en-US" sz="1500" dirty="0"/>
+          </a:p>
+          <a:p>
+            <a:pPr indent="0" marL="0">
+              <a:buNone/>
+            </a:pPr>
+            <a:r>
+              <a:rPr lang="en-US" sz="1050" dirty="0">
+                <a:solidFill>
+                  <a:srgbClr val="FFFFFF"/>
+                </a:solidFill>
+              </a:rPr>
+              <a:t>Pressure from bidders, investors</a:t>
+            </a:r>
+            <a:endParaRPr lang="en-US" sz="1500" dirty="0"/>
+          </a:p>
+        </p:txBody>
+      </p:sp>
+      <p:sp>
+        <p:nvSpPr>
+          <p:cNvPr id="19" name="yr10"/>
+          <p:cNvSpPr/>
+          <p:nvPr/>
+        </p:nvSpPr>
+        <p:spPr>
+          <a:xfrm>
+            <a:off x="3268980" y="2414016"/>
+            <a:ext cx="475488" cy="475488"/>
+          </a:xfrm>
+          <a:prstGeom prst="ellipse">
+            <a:avLst/>
+          </a:prstGeom>
+          <a:solidFill>
+            <a:schemeClr val="accent3"/>
+          </a:solidFill>
+          <a:ln/>
+        </p:spPr>
+      </p:sp>
+      <p:sp>
+        <p:nvSpPr>
+          <p:cNvPr id="20" name="Text 18"/>
+          <p:cNvSpPr txBox="1"/>
+          <p:nvPr/>
+        </p:nvSpPr>
+        <p:spPr>
+          <a:xfrm>
+            <a:off x="3268980" y="2414016"/>
+            <a:ext cx="475488" cy="475488"/>
+          </a:xfrm>
+          <a:prstGeom prst="rect">
+            <a:avLst/>
+          </a:prstGeom>
+          <a:noFill/>
+          <a:ln/>
+        </p:spPr>
+        <p:txBody>
+          <a:bodyPr wrap="square" lIns="0" tIns="0" rIns="0" bIns="0" rtlCol="0" anchor="ctr"/>
+          <a:lstStyle/>
+          <a:p>
+            <a:pPr algn="ctr" indent="0" marL="0">
+              <a:buNone/>
+            </a:pPr>
+            <a:r>
+              <a:rPr lang="en-US" sz="1000" b="1" dirty="0">
+                <a:solidFill>
+                  <a:srgbClr val="FFFFFF"/>
+                </a:solidFill>
+              </a:rPr>
+              <a:t>2017</a:t>
+            </a:r>
+            <a:endParaRPr lang="en-US" sz="1000" dirty="0"/>
+          </a:p>
+        </p:txBody>
+      </p:sp>
+      <p:sp>
+        <p:nvSpPr>
+          <p:cNvPr id="21" name="Text 19"/>
+          <p:cNvSpPr txBox="1"/>
+          <p:nvPr/>
+        </p:nvSpPr>
+        <p:spPr>
+          <a:xfrm>
+            <a:off x="3817620" y="2377440"/>
+            <a:ext cx="2057400" cy="603504"/>
+          </a:xfrm>
+          <a:prstGeom prst="rect">
+            <a:avLst/>
+          </a:prstGeom>
+          <a:noFill/>
+          <a:ln/>
+        </p:spPr>
+        <p:txBody>
+          <a:bodyPr wrap="square" lIns="0" tIns="0" rIns="0" bIns="0" rtlCol="0" anchor="t"/>
+          <a:lstStyle/>
+          <a:p>
+            <a:pPr indent="0" marL="0">
+              <a:buNone/>
+            </a:pPr>
+            <a:r>
+              <a:rPr lang="en-US" sz="1250" b="1" dirty="0">
+                <a:solidFill>
+                  <a:schemeClr val="tx1"/>
+                </a:solidFill>
+              </a:rPr>
+              <a:t>Kraft Heinz bid</a:t>
+            </a:r>
+            <a:endParaRPr lang="en-US" sz="1250" dirty="0"/>
+          </a:p>
+          <a:p>
+            <a:pPr indent="0" marL="0">
+              <a:buNone/>
+            </a:pPr>
+            <a:r>
+              <a:rPr lang="en-US" sz="1050" dirty="0">
+                <a:solidFill>
+                  <a:schemeClr val="accent4"/>
+                </a:solidFill>
+              </a:rPr>
+              <a:t>$143bn offer rejected, then withdrawn</a:t>
+            </a:r>
+            <a:endParaRPr lang="en-US" sz="1250" dirty="0"/>
+          </a:p>
+        </p:txBody>
+      </p:sp>
+      <p:sp>
+        <p:nvSpPr>
+          <p:cNvPr id="22" name="yr11"/>
+          <p:cNvSpPr/>
+          <p:nvPr/>
+        </p:nvSpPr>
+        <p:spPr>
+          <a:xfrm>
+            <a:off x="3268980" y="3127248"/>
+            <a:ext cx="475488" cy="475488"/>
+          </a:xfrm>
+          <a:prstGeom prst="ellipse">
+            <a:avLst/>
+          </a:prstGeom>
+          <a:solidFill>
+            <a:schemeClr val="accent3"/>
+          </a:solidFill>
+          <a:ln/>
+        </p:spPr>
+      </p:sp>
+      <p:sp>
+        <p:nvSpPr>
+          <p:cNvPr id="23" name="Text 21"/>
+          <p:cNvSpPr txBox="1"/>
+          <p:nvPr/>
+        </p:nvSpPr>
+        <p:spPr>
+          <a:xfrm>
+            <a:off x="3268980" y="3127248"/>
+            <a:ext cx="475488" cy="475488"/>
+          </a:xfrm>
+          <a:prstGeom prst="rect">
+            <a:avLst/>
+          </a:prstGeom>
+          <a:noFill/>
+          <a:ln/>
+        </p:spPr>
+        <p:txBody>
+          <a:bodyPr wrap="square" lIns="0" tIns="0" rIns="0" bIns="0" rtlCol="0" anchor="ctr"/>
+          <a:lstStyle/>
+          <a:p>
+            <a:pPr algn="ctr" indent="0" marL="0">
+              <a:buNone/>
+            </a:pPr>
+            <a:r>
+              <a:rPr lang="en-US" sz="1000" b="1" dirty="0">
+                <a:solidFill>
+                  <a:srgbClr val="FFFFFF"/>
+                </a:solidFill>
+              </a:rPr>
+              <a:t>2022</a:t>
+            </a:r>
+            <a:endParaRPr lang="en-US" sz="1000" dirty="0"/>
+          </a:p>
+        </p:txBody>
+      </p:sp>
+      <p:sp>
+        <p:nvSpPr>
+          <p:cNvPr id="24" name="Text 22"/>
+          <p:cNvSpPr txBox="1"/>
+          <p:nvPr/>
+        </p:nvSpPr>
+        <p:spPr>
+          <a:xfrm>
+            <a:off x="3817620" y="3090672"/>
+            <a:ext cx="2057400" cy="603504"/>
+          </a:xfrm>
+          <a:prstGeom prst="rect">
+            <a:avLst/>
+          </a:prstGeom>
+          <a:noFill/>
+          <a:ln/>
+        </p:spPr>
+        <p:txBody>
+          <a:bodyPr wrap="square" lIns="0" tIns="0" rIns="0" bIns="0" rtlCol="0" anchor="t"/>
+          <a:lstStyle/>
+          <a:p>
+            <a:pPr indent="0" marL="0">
+              <a:buNone/>
+            </a:pPr>
+            <a:r>
+              <a:rPr lang="en-US" sz="1250" b="1" dirty="0">
+                <a:solidFill>
+                  <a:schemeClr val="tx1"/>
+                </a:solidFill>
+              </a:rPr>
+              <a:t>GSK Consumer Health</a:t>
+            </a:r>
+            <a:endParaRPr lang="en-US" sz="1250" dirty="0"/>
+          </a:p>
+          <a:p>
+            <a:pPr indent="0" marL="0">
+              <a:buNone/>
+            </a:pPr>
+            <a:r>
+              <a:rPr lang="en-US" sz="1050" dirty="0">
+                <a:solidFill>
+                  <a:schemeClr val="accent4"/>
+                </a:solidFill>
+              </a:rPr>
+              <a:t>£50bn bid dropped after investors objected</a:t>
+            </a:r>
+            <a:endParaRPr lang="en-US" sz="1250" dirty="0"/>
+          </a:p>
+        </p:txBody>
+      </p:sp>
+      <p:sp>
+        <p:nvSpPr>
+          <p:cNvPr id="25" name="phase2"/>
+          <p:cNvSpPr/>
+          <p:nvPr/>
+        </p:nvSpPr>
+        <p:spPr>
+          <a:xfrm>
+            <a:off x="6080760" y="1691640"/>
+            <a:ext cx="2606040" cy="566928"/>
+          </a:xfrm>
+          <a:prstGeom prst="roundRect">
+            <a:avLst>
+              <a:gd name="adj" fmla="val 12903"/>
+            </a:avLst>
+          </a:prstGeom>
+          <a:solidFill>
+            <a:schemeClr val="accent2"/>
+          </a:solidFill>
+          <a:ln/>
+        </p:spPr>
+      </p:sp>
+      <p:sp>
+        <p:nvSpPr>
+          <p:cNvPr id="26" name="Text 24"/>
+          <p:cNvSpPr txBox="1"/>
+          <p:nvPr/>
+        </p:nvSpPr>
+        <p:spPr>
+          <a:xfrm>
+            <a:off x="6190488" y="1691640"/>
+            <a:ext cx="2386584" cy="566928"/>
+          </a:xfrm>
+          <a:prstGeom prst="rect">
+            <a:avLst/>
+          </a:prstGeom>
+          <a:noFill/>
+          <a:ln/>
+        </p:spPr>
+        <p:txBody>
+          <a:bodyPr wrap="square" lIns="0" tIns="0" rIns="0" bIns="0" rtlCol="0" anchor="ctr"/>
+          <a:lstStyle/>
+          <a:p>
+            <a:pPr indent="0" marL="0">
+              <a:buNone/>
+            </a:pPr>
+            <a:r>
+              <a:rPr lang="en-US" sz="1500" b="1" dirty="0">
+                <a:solidFill>
+                  <a:srgbClr val="FFFFFF"/>
+                </a:solidFill>
+              </a:rPr>
+              <a:t>SELL</a:t>
+            </a:r>
+            <a:endParaRPr lang="en-US" sz="1500" dirty="0"/>
+          </a:p>
+          <a:p>
+            <a:pPr indent="0" marL="0">
+              <a:buNone/>
+            </a:pPr>
+            <a:r>
+              <a:rPr lang="en-US" sz="1050" dirty="0">
+                <a:solidFill>
+                  <a:srgbClr val="FFFFFF"/>
+                </a:solidFill>
+              </a:rPr>
+              <a:t>Simplify and focus on the core</a:t>
+            </a:r>
+            <a:endParaRPr lang="en-US" sz="1500" dirty="0"/>
+          </a:p>
+        </p:txBody>
+      </p:sp>
+      <p:sp>
+        <p:nvSpPr>
+          <p:cNvPr id="27" name="yr20"/>
+          <p:cNvSpPr/>
+          <p:nvPr/>
+        </p:nvSpPr>
+        <p:spPr>
+          <a:xfrm>
+            <a:off x="6080760" y="2414016"/>
+            <a:ext cx="475488" cy="475488"/>
+          </a:xfrm>
+          <a:prstGeom prst="ellipse">
+            <a:avLst/>
+          </a:prstGeom>
+          <a:solidFill>
+            <a:schemeClr val="accent2"/>
+          </a:solidFill>
+          <a:ln/>
+        </p:spPr>
+      </p:sp>
+      <p:sp>
+        <p:nvSpPr>
+          <p:cNvPr id="28" name="Text 26"/>
+          <p:cNvSpPr txBox="1"/>
+          <p:nvPr/>
+        </p:nvSpPr>
+        <p:spPr>
+          <a:xfrm>
+            <a:off x="6080760" y="2414016"/>
+            <a:ext cx="475488" cy="475488"/>
+          </a:xfrm>
+          <a:prstGeom prst="rect">
+            <a:avLst/>
+          </a:prstGeom>
+          <a:noFill/>
+          <a:ln/>
+        </p:spPr>
+        <p:txBody>
+          <a:bodyPr wrap="square" lIns="0" tIns="0" rIns="0" bIns="0" rtlCol="0" anchor="ctr"/>
+          <a:lstStyle/>
+          <a:p>
+            <a:pPr algn="ctr" indent="0" marL="0">
+              <a:buNone/>
+            </a:pPr>
+            <a:r>
+              <a:rPr lang="en-US" sz="1000" b="1" dirty="0">
+                <a:solidFill>
+                  <a:srgbClr val="FFFFFF"/>
+                </a:solidFill>
+              </a:rPr>
+              <a:t>2023</a:t>
+            </a:r>
+            <a:endParaRPr lang="en-US" sz="1000" dirty="0"/>
+          </a:p>
+        </p:txBody>
+      </p:sp>
+      <p:sp>
+        <p:nvSpPr>
+          <p:cNvPr id="29" name="Text 27"/>
+          <p:cNvSpPr txBox="1"/>
+          <p:nvPr/>
+        </p:nvSpPr>
+        <p:spPr>
+          <a:xfrm>
+            <a:off x="6629400" y="2377440"/>
+            <a:ext cx="2057400" cy="603504"/>
+          </a:xfrm>
+          <a:prstGeom prst="rect">
+            <a:avLst/>
+          </a:prstGeom>
+          <a:noFill/>
+          <a:ln/>
+        </p:spPr>
+        <p:txBody>
+          <a:bodyPr wrap="square" lIns="0" tIns="0" rIns="0" bIns="0" rtlCol="0" anchor="t"/>
+          <a:lstStyle/>
+          <a:p>
+            <a:pPr indent="0" marL="0">
+              <a:buNone/>
+            </a:pPr>
+            <a:r>
+              <a:rPr lang="en-US" sz="1250" b="1" dirty="0">
+                <a:solidFill>
+                  <a:schemeClr val="tx1"/>
+                </a:solidFill>
+              </a:rPr>
+              <a:t>Dollar Shave Club</a:t>
+            </a:r>
+            <a:endParaRPr lang="en-US" sz="1250" dirty="0"/>
+          </a:p>
+          <a:p>
+            <a:pPr indent="0" marL="0">
+              <a:buNone/>
+            </a:pPr>
+            <a:r>
+              <a:rPr lang="en-US" sz="1050" dirty="0">
+                <a:solidFill>
+                  <a:schemeClr val="accent4"/>
+                </a:solidFill>
+              </a:rPr>
+              <a:t>majority stake sold</a:t>
+            </a:r>
+            <a:endParaRPr lang="en-US" sz="1250" dirty="0"/>
+          </a:p>
+        </p:txBody>
+      </p:sp>
+      <p:sp>
+        <p:nvSpPr>
+          <p:cNvPr id="30" name="yr21"/>
+          <p:cNvSpPr/>
+          <p:nvPr/>
+        </p:nvSpPr>
+        <p:spPr>
+          <a:xfrm>
+            <a:off x="6080760" y="3127248"/>
+            <a:ext cx="475488" cy="475488"/>
+          </a:xfrm>
+          <a:prstGeom prst="ellipse">
+            <a:avLst/>
+          </a:prstGeom>
+          <a:solidFill>
+            <a:schemeClr val="accent2"/>
+          </a:solidFill>
+          <a:ln/>
+        </p:spPr>
+      </p:sp>
+      <p:sp>
+        <p:nvSpPr>
+          <p:cNvPr id="31" name="Text 29"/>
+          <p:cNvSpPr txBox="1"/>
+          <p:nvPr/>
+        </p:nvSpPr>
+        <p:spPr>
+          <a:xfrm>
+            <a:off x="6080760" y="3127248"/>
+            <a:ext cx="475488" cy="475488"/>
+          </a:xfrm>
+          <a:prstGeom prst="rect">
+            <a:avLst/>
+          </a:prstGeom>
+          <a:noFill/>
+          <a:ln/>
+        </p:spPr>
+        <p:txBody>
+          <a:bodyPr wrap="square" lIns="0" tIns="0" rIns="0" bIns="0" rtlCol="0" anchor="ctr"/>
+          <a:lstStyle/>
+          <a:p>
+            <a:pPr algn="ctr" indent="0" marL="0">
+              <a:buNone/>
+            </a:pPr>
+            <a:r>
+              <a:rPr lang="en-US" sz="1000" b="1" dirty="0">
+                <a:solidFill>
+                  <a:srgbClr val="FFFFFF"/>
+                </a:solidFill>
+              </a:rPr>
+              <a:t>2025</a:t>
+            </a:r>
+            <a:endParaRPr lang="en-US" sz="1000" dirty="0"/>
+          </a:p>
+        </p:txBody>
+      </p:sp>
+      <p:sp>
+        <p:nvSpPr>
+          <p:cNvPr id="32" name="Text 30"/>
+          <p:cNvSpPr txBox="1"/>
+          <p:nvPr/>
+        </p:nvSpPr>
+        <p:spPr>
+          <a:xfrm>
+            <a:off x="6629400" y="3090672"/>
+            <a:ext cx="2057400" cy="603504"/>
+          </a:xfrm>
+          <a:prstGeom prst="rect">
+            <a:avLst/>
+          </a:prstGeom>
+          <a:noFill/>
+          <a:ln/>
+        </p:spPr>
+        <p:txBody>
+          <a:bodyPr wrap="square" lIns="0" tIns="0" rIns="0" bIns="0" rtlCol="0" anchor="t"/>
+          <a:lstStyle/>
+          <a:p>
+            <a:pPr indent="0" marL="0">
+              <a:buNone/>
+            </a:pPr>
+            <a:r>
+              <a:rPr lang="en-US" sz="1250" b="1" dirty="0">
+                <a:solidFill>
+                  <a:schemeClr val="tx1"/>
+                </a:solidFill>
+              </a:rPr>
+              <a:t>Ice cream → Magnum</a:t>
+            </a:r>
+            <a:endParaRPr lang="en-US" sz="1250" dirty="0"/>
+          </a:p>
+          <a:p>
+            <a:pPr indent="0" marL="0">
+              <a:buNone/>
+            </a:pPr>
+            <a:r>
+              <a:rPr lang="en-US" sz="1050" dirty="0">
+                <a:solidFill>
+                  <a:schemeClr val="accent4"/>
+                </a:solidFill>
+              </a:rPr>
+              <a:t>demerged and listed</a:t>
+            </a:r>
+            <a:endParaRPr lang="en-US" sz="1250" dirty="0"/>
+          </a:p>
+        </p:txBody>
+      </p:sp>
+      <p:sp>
+        <p:nvSpPr>
+          <p:cNvPr id="33" name="yr22"/>
+          <p:cNvSpPr/>
+          <p:nvPr/>
+        </p:nvSpPr>
+        <p:spPr>
+          <a:xfrm>
+            <a:off x="6080760" y="3840480"/>
+            <a:ext cx="475488" cy="475488"/>
+          </a:xfrm>
+          <a:prstGeom prst="ellipse">
+            <a:avLst/>
+          </a:prstGeom>
+          <a:solidFill>
+            <a:schemeClr val="accent2"/>
+          </a:solidFill>
+          <a:ln/>
+        </p:spPr>
+      </p:sp>
+      <p:sp>
+        <p:nvSpPr>
+          <p:cNvPr id="34" name="Text 32"/>
+          <p:cNvSpPr txBox="1"/>
+          <p:nvPr/>
+        </p:nvSpPr>
+        <p:spPr>
+          <a:xfrm>
+            <a:off x="6080760" y="3840480"/>
+            <a:ext cx="475488" cy="475488"/>
+          </a:xfrm>
+          <a:prstGeom prst="rect">
+            <a:avLst/>
+          </a:prstGeom>
+          <a:noFill/>
+          <a:ln/>
+        </p:spPr>
+        <p:txBody>
+          <a:bodyPr wrap="square" lIns="0" tIns="0" rIns="0" bIns="0" rtlCol="0" anchor="ctr"/>
+          <a:lstStyle/>
+          <a:p>
+            <a:pPr algn="ctr" indent="0" marL="0">
+              <a:buNone/>
+            </a:pPr>
+            <a:r>
+              <a:rPr lang="en-US" sz="1000" b="1" dirty="0">
+                <a:solidFill>
+                  <a:srgbClr val="FFFFFF"/>
+                </a:solidFill>
+              </a:rPr>
+              <a:t>2026</a:t>
+            </a:r>
+            <a:endParaRPr lang="en-US" sz="1000" dirty="0"/>
+          </a:p>
+        </p:txBody>
+      </p:sp>
+      <p:sp>
+        <p:nvSpPr>
+          <p:cNvPr id="35" name="Text 33"/>
+          <p:cNvSpPr txBox="1"/>
+          <p:nvPr/>
+        </p:nvSpPr>
+        <p:spPr>
+          <a:xfrm>
+            <a:off x="6629400" y="3803904"/>
+            <a:ext cx="2057400" cy="603504"/>
+          </a:xfrm>
+          <a:prstGeom prst="rect">
+            <a:avLst/>
+          </a:prstGeom>
+          <a:noFill/>
+          <a:ln/>
+        </p:spPr>
+        <p:txBody>
+          <a:bodyPr wrap="square" lIns="0" tIns="0" rIns="0" bIns="0" rtlCol="0" anchor="t"/>
+          <a:lstStyle/>
+          <a:p>
+            <a:pPr indent="0" marL="0">
+              <a:buNone/>
+            </a:pPr>
+            <a:r>
+              <a:rPr lang="en-US" sz="1250" b="1" dirty="0">
+                <a:solidFill>
+                  <a:schemeClr val="tx1"/>
+                </a:solidFill>
+              </a:rPr>
+              <a:t>Food → McCormick</a:t>
+            </a:r>
+            <a:endParaRPr lang="en-US" sz="1250" dirty="0"/>
+          </a:p>
+          <a:p>
+            <a:pPr indent="0" marL="0">
+              <a:buNone/>
+            </a:pPr>
+            <a:r>
+              <a:rPr lang="en-US" sz="1050" dirty="0">
+                <a:solidFill>
+                  <a:schemeClr val="accent4"/>
+                </a:solidFill>
+              </a:rPr>
+              <a:t>$44.8bn, announced; close expected 2027</a:t>
+            </a:r>
+            <a:endParaRPr lang="en-US" sz="1250" dirty="0"/>
+          </a:p>
+        </p:txBody>
+      </p:sp>
+      <p:sp>
+        <p:nvSpPr>
+          <p:cNvPr id="36" name="Text 34"/>
+          <p:cNvSpPr txBox="1"/>
+          <p:nvPr/>
+        </p:nvSpPr>
+        <p:spPr>
+          <a:xfrm>
+            <a:off x="457200" y="4663440"/>
+            <a:ext cx="8229600" cy="320040"/>
+          </a:xfrm>
+          <a:prstGeom prst="rect">
+            <a:avLst/>
+          </a:prstGeom>
+          <a:noFill/>
+          <a:ln/>
+        </p:spPr>
+        <p:txBody>
+          <a:bodyPr wrap="square" lIns="0" tIns="0" rIns="0" bIns="0" rtlCol="0" anchor="ctr"/>
+          <a:lstStyle/>
+          <a:p>
+            <a:pPr indent="0" marL="0">
+              <a:buNone/>
+            </a:pPr>
+            <a:r>
+              <a:rPr lang="en-US" sz="800" dirty="0">
+                <a:solidFill>
+                  <a:schemeClr val="accent4"/>
+                </a:solidFill>
+              </a:rPr>
+              <a:t>Sources: Encyclopedia.com (n.d.); CNNfn (2000); UPI (2000); Primack (2016); Associated Press (2017); Williams (2022); James (2023); Reuters (2025); Redmond (2026).</a:t>
+            </a:r>
+            <a:endParaRPr lang="en-US" sz="800" dirty="0"/>
+          </a:p>
+        </p:txBody>
+      </p:sp>
+    </p:spTree>
+  </p:cSld>
+  <p:clrMapOvr>
+    <a:masterClrMapping/>
+  </p:clrMapOvr>
+</p:sld>
+</file>
+
+<file path=ppt/slides/slide3.xml><?xml version="1.0" encoding="utf-8"?>
+<p:sld xmlns:a="http://schemas.openxmlformats.org/drawingml/2006/main" xmlns:r="http://schemas.openxmlformats.org/officeDocument/2006/relationships" xmlns:p="http://schemas.openxmlformats.org/presentationml/2006/main">
+  <p:cSld name="Slide 3">
+    <p:spTree>
+      <p:nvGrpSpPr>
+        <p:cNvPr id="1" name=""/>
+        <p:cNvGrpSpPr/>
+        <p:nvPr/>
+      </p:nvGrpSpPr>
+      <p:grpSpPr>
+        <a:xfrm>
+          <a:off x="0" y="0"/>
+          <a:ext cx="0" cy="0"/>
+          <a:chOff x="0" y="0"/>
+          <a:chExt cx="0" cy="0"/>
+        </a:xfrm>
+      </p:grpSpPr>
+      <p:sp>
+        <p:nvSpPr>
+          <p:cNvPr id="2" name="Text 0"/>
+          <p:cNvSpPr/>
+          <p:nvPr>
+            <p:ph idx="100" type="title" hasCustomPrompt="1"/>
+          </p:nvPr>
+        </p:nvSpPr>
+        <p:spPr>
+          <a:xfrm>
+            <a:off x="457200" y="274320"/>
+            <a:ext cx="8229600" cy="548640"/>
+          </a:xfrm>
+          <a:prstGeom prst="rect">
+            <a:avLst/>
+          </a:prstGeom>
+          <a:noFill/>
+          <a:ln/>
+        </p:spPr>
+        <p:txBody>
+          <a:bodyPr wrap="square" lIns="0" tIns="0" rIns="0" bIns="0" rtlCol="0" anchor="t"/>
+          <a:lstStyle/>
+          <a:p>
+            <a:pPr algn="l" indent="0" marL="0">
+              <a:buNone/>
+            </a:pPr>
+            <a:r>
+              <a:rPr lang="en-US" sz="2800" b="1" dirty="0">
+                <a:solidFill>
+                  <a:schemeClr val="tx2"/>
+                </a:solidFill>
+              </a:rPr>
               <a:t>McCormick deal: what M&amp;A theory says</a:t>
             </a:r>
             <a:endParaRPr lang="en-US" sz="2800" dirty="0"/>
@@ -3002,9 +4312,337 @@
                   <a:schemeClr val="accent4"/>
                 </a:solidFill>
               </a:rPr>
-              <a:t>Sources: Advisor Perspectives (2026); NJBIZ (2026); CNN (2026). Deal announced 31 March 2026, subject to regulatory approval.</a:t>
+              <a:t>Sources: Barber (2026); Valinsky (2026); Redmond (2026). Deal announced 31 March 2026, subject to regulatory approval.</a:t>
             </a:r>
             <a:endParaRPr lang="en-US" sz="850" dirty="0"/>
+          </a:p>
+        </p:txBody>
+      </p:sp>
+    </p:spTree>
+  </p:cSld>
+  <p:clrMapOvr>
+    <a:masterClrMapping/>
+  </p:clrMapOvr>
+</p:sld>
+</file>
+
+<file path=ppt/slides/slide4.xml><?xml version="1.0" encoding="utf-8"?>
+<p:sld xmlns:a="http://schemas.openxmlformats.org/drawingml/2006/main" xmlns:r="http://schemas.openxmlformats.org/officeDocument/2006/relationships" xmlns:p="http://schemas.openxmlformats.org/presentationml/2006/main">
+  <p:cSld name="Slide 4">
+    <p:spTree>
+      <p:nvGrpSpPr>
+        <p:cNvPr id="1" name=""/>
+        <p:cNvGrpSpPr/>
+        <p:nvPr/>
+      </p:nvGrpSpPr>
+      <p:grpSpPr>
+        <a:xfrm>
+          <a:off x="0" y="0"/>
+          <a:ext cx="0" cy="0"/>
+          <a:chOff x="0" y="0"/>
+          <a:chExt cx="0" cy="0"/>
+        </a:xfrm>
+      </p:grpSpPr>
+      <p:sp>
+        <p:nvSpPr>
+          <p:cNvPr id="2" name="Text 0"/>
+          <p:cNvSpPr/>
+          <p:nvPr>
+            <p:ph idx="100" type="title" hasCustomPrompt="1"/>
+          </p:nvPr>
+        </p:nvSpPr>
+        <p:spPr>
+          <a:xfrm>
+            <a:off x="457200" y="274320"/>
+            <a:ext cx="8229600" cy="548640"/>
+          </a:xfrm>
+          <a:prstGeom prst="rect">
+            <a:avLst/>
+          </a:prstGeom>
+          <a:noFill/>
+          <a:ln/>
+        </p:spPr>
+        <p:txBody>
+          <a:bodyPr wrap="square" lIns="0" tIns="0" rIns="0" bIns="0" rtlCol="0" anchor="t"/>
+          <a:lstStyle/>
+          <a:p>
+            <a:pPr algn="l" indent="0" marL="0">
+              <a:buNone/>
+            </a:pPr>
+            <a:r>
+              <a:rPr lang="en-US" sz="2800" b="1" dirty="0">
+                <a:solidFill>
+                  <a:schemeClr val="tx2"/>
+                </a:solidFill>
+              </a:rPr>
+              <a:t>References</a:t>
+            </a:r>
+            <a:endParaRPr lang="en-US" sz="2800" dirty="0"/>
+          </a:p>
+        </p:txBody>
+      </p:sp>
+      <p:sp>
+        <p:nvSpPr>
+          <p:cNvPr id="3" name="Text 1"/>
+          <p:cNvSpPr txBox="1"/>
+          <p:nvPr/>
+        </p:nvSpPr>
+        <p:spPr>
+          <a:xfrm>
+            <a:off x="457200" y="914400"/>
+            <a:ext cx="4023360" cy="3977640"/>
+          </a:xfrm>
+          <a:prstGeom prst="rect">
+            <a:avLst/>
+          </a:prstGeom>
+          <a:noFill/>
+          <a:ln/>
+        </p:spPr>
+        <p:txBody>
+          <a:bodyPr wrap="square" lIns="0" tIns="0" rIns="0" bIns="0" rtlCol="0" anchor="t"/>
+          <a:lstStyle/>
+          <a:p>
+            <a:pPr indent="0" marL="0">
+              <a:spcAft>
+                <a:spcPts val="500"/>
+              </a:spcAft>
+              <a:buNone/>
+            </a:pPr>
+            <a:r>
+              <a:rPr lang="en-US" sz="800" dirty="0">
+                <a:solidFill>
+                  <a:schemeClr val="tx1"/>
+                </a:solidFill>
+              </a:rPr>
+              <a:t>Associated Press (2017) 'Kraft Heinz withdraws $143 billion bid to buy Unilever', NBC News, 19 February. Available at: https://www.nbcnews.com/news/us-news/kraft-heinz-withdraws-143-billion-bid-buy-unilever-n723041 (Accessed: 21 October 2026).</a:t>
+            </a:r>
+            <a:endParaRPr lang="en-US" sz="800" dirty="0"/>
+          </a:p>
+          <a:p>
+            <a:pPr indent="0" marL="0">
+              <a:spcAft>
+                <a:spcPts val="500"/>
+              </a:spcAft>
+              <a:buNone/>
+            </a:pPr>
+            <a:r>
+              <a:rPr lang="en-US" sz="800" dirty="0">
+                <a:solidFill>
+                  <a:schemeClr val="tx1"/>
+                </a:solidFill>
+              </a:rPr>
+              <a:t>Barber, L. (2026) 'Unilever confirms food spin-off sale talks as beauty portfolio takes centre stage', Cosmetics Business, 20 March. Available at: https://cosmeticsbusiness.com/unilever-confirms-food-sale-talks-beauty-focus (Accessed: 21 October 2026).</a:t>
+            </a:r>
+            <a:endParaRPr lang="en-US" sz="800" dirty="0"/>
+          </a:p>
+          <a:p>
+            <a:pPr indent="0" marL="0">
+              <a:spcAft>
+                <a:spcPts val="500"/>
+              </a:spcAft>
+              <a:buNone/>
+            </a:pPr>
+            <a:r>
+              <a:rPr lang="en-US" sz="800" dirty="0">
+                <a:solidFill>
+                  <a:schemeClr val="tx1"/>
+                </a:solidFill>
+              </a:rPr>
+              <a:t>Christensen, C.M., Alton, R., Rising, C. and Waldeck, A. (2011) 'The new M&amp;A playbook', Harvard Business Review, 89(3), pp. 48–57.</a:t>
+            </a:r>
+            <a:endParaRPr lang="en-US" sz="800" dirty="0"/>
+          </a:p>
+          <a:p>
+            <a:pPr indent="0" marL="0">
+              <a:spcAft>
+                <a:spcPts val="500"/>
+              </a:spcAft>
+              <a:buNone/>
+            </a:pPr>
+            <a:r>
+              <a:rPr lang="en-US" sz="800" dirty="0">
+                <a:solidFill>
+                  <a:schemeClr val="tx1"/>
+                </a:solidFill>
+              </a:rPr>
+              <a:t>CNNfn (2000) 'Unilever wins Bestfoods', CNNMoney, 6 June. Available at: https://money.cnn.com/2000/06/06/deals/bestfoods/ (Accessed: 21 October 2026).</a:t>
+            </a:r>
+            <a:endParaRPr lang="en-US" sz="800" dirty="0"/>
+          </a:p>
+          <a:p>
+            <a:pPr indent="0" marL="0">
+              <a:spcAft>
+                <a:spcPts val="500"/>
+              </a:spcAft>
+              <a:buNone/>
+            </a:pPr>
+            <a:r>
+              <a:rPr lang="en-US" sz="800" dirty="0">
+                <a:solidFill>
+                  <a:schemeClr val="tx1"/>
+                </a:solidFill>
+              </a:rPr>
+              <a:t>Encyclopedia.com (n.d.) 'Unilever', International Directory of Company Histories. Available at: https://www.encyclopedia.com/books/politics-and-business-magazines/unilever (Accessed: 21 October 2026).</a:t>
+            </a:r>
+            <a:endParaRPr lang="en-US" sz="800" dirty="0"/>
+          </a:p>
+          <a:p>
+            <a:pPr indent="0" marL="0">
+              <a:spcAft>
+                <a:spcPts val="500"/>
+              </a:spcAft>
+              <a:buNone/>
+            </a:pPr>
+            <a:r>
+              <a:rPr lang="en-US" sz="800" dirty="0">
+                <a:solidFill>
+                  <a:schemeClr val="tx1"/>
+                </a:solidFill>
+              </a:rPr>
+              <a:t>James, D. (2023) 'Unilever to sell Dollar Shave Club', Retail Dive, 26 October. Available at: https://www.retaildive.com/news/unilever-sells-razor-subscription-brand-dollar-shave-club/697913 (Accessed: 21 October 2026).</a:t>
+            </a:r>
+            <a:endParaRPr lang="en-US" sz="800" dirty="0"/>
+          </a:p>
+          <a:p>
+            <a:pPr indent="0" marL="0">
+              <a:spcAft>
+                <a:spcPts val="500"/>
+              </a:spcAft>
+              <a:buNone/>
+            </a:pPr>
+            <a:r>
+              <a:rPr lang="en-US" sz="800" dirty="0">
+                <a:solidFill>
+                  <a:schemeClr val="tx1"/>
+                </a:solidFill>
+              </a:rPr>
+              <a:t>Primack, D. (2016) 'Unilever buys Dollar Shave Club for $1 billion', Fortune, 19 July. Available at: https://fortune.com/2016/07/19/unilever-buys-dollar-shave-club-for-1-billion (Accessed: 21 October 2026).</a:t>
+            </a:r>
+            <a:endParaRPr lang="en-US" sz="800" dirty="0"/>
+          </a:p>
+        </p:txBody>
+      </p:sp>
+      <p:sp>
+        <p:nvSpPr>
+          <p:cNvPr id="4" name="Text 2"/>
+          <p:cNvSpPr txBox="1"/>
+          <p:nvPr/>
+        </p:nvSpPr>
+        <p:spPr>
+          <a:xfrm>
+            <a:off x="4663440" y="914400"/>
+            <a:ext cx="4023360" cy="3977640"/>
+          </a:xfrm>
+          <a:prstGeom prst="rect">
+            <a:avLst/>
+          </a:prstGeom>
+          <a:noFill/>
+          <a:ln/>
+        </p:spPr>
+        <p:txBody>
+          <a:bodyPr wrap="square" lIns="0" tIns="0" rIns="0" bIns="0" rtlCol="0" anchor="t"/>
+          <a:lstStyle/>
+          <a:p>
+            <a:pPr indent="0" marL="0">
+              <a:spcAft>
+                <a:spcPts val="500"/>
+              </a:spcAft>
+              <a:buNone/>
+            </a:pPr>
+            <a:r>
+              <a:rPr lang="en-US" sz="800" dirty="0">
+                <a:solidFill>
+                  <a:schemeClr val="tx1"/>
+                </a:solidFill>
+              </a:rPr>
+              <a:t>Redmond, K. (2026) 'McCormick to acquire Unilever's food business in $44.8B deal', NJBIZ, 1 April. Available at: https://njbiz.com/mccormick-unilever-food-business-44-8b-deal/ (Accessed: 21 October 2026).</a:t>
+            </a:r>
+            <a:endParaRPr lang="en-US" sz="800" dirty="0"/>
+          </a:p>
+          <a:p>
+            <a:pPr indent="0" marL="0">
+              <a:spcAft>
+                <a:spcPts val="500"/>
+              </a:spcAft>
+              <a:buNone/>
+            </a:pPr>
+            <a:r>
+              <a:rPr lang="en-US" sz="800" dirty="0">
+                <a:solidFill>
+                  <a:schemeClr val="tx1"/>
+                </a:solidFill>
+              </a:rPr>
+              <a:t>Reuters (2025) 'Magnum Ice Cream valued at $9.1 billion in Amsterdam listing', MarketScreener, 8 December. Available at: https://www.marketscreener.com/news/unilever-completes-ice-cream-demerger-with-magnum-set-to-list-ce7d51dddc8df620 (Accessed: 21 October 2026).</a:t>
+            </a:r>
+            <a:endParaRPr lang="en-US" sz="800" dirty="0"/>
+          </a:p>
+          <a:p>
+            <a:pPr indent="0" marL="0">
+              <a:spcAft>
+                <a:spcPts val="500"/>
+              </a:spcAft>
+              <a:buNone/>
+            </a:pPr>
+            <a:r>
+              <a:rPr lang="en-US" sz="800" dirty="0">
+                <a:solidFill>
+                  <a:schemeClr val="tx1"/>
+                </a:solidFill>
+              </a:rPr>
+              <a:t>University of Greenwich (2026) 'Lecture 3: Diversification – M&amp;A and/or FDI?' [Lecture slides]. BUSI 1763 Dynamics of Global Business. Available at: Moodle (Accessed: 21 October 2026).</a:t>
+            </a:r>
+            <a:endParaRPr lang="en-US" sz="800" dirty="0"/>
+          </a:p>
+          <a:p>
+            <a:pPr indent="0" marL="0">
+              <a:spcAft>
+                <a:spcPts val="500"/>
+              </a:spcAft>
+              <a:buNone/>
+            </a:pPr>
+            <a:r>
+              <a:rPr lang="en-US" sz="800" dirty="0">
+                <a:solidFill>
+                  <a:schemeClr val="tx1"/>
+                </a:solidFill>
+              </a:rPr>
+              <a:t>UPI (2000) 'Unilever buys Ben &amp; Jerry's', United Press International, 12 April. Available at: https://www.upi.com/Archives/2000/04/12/Unilever-buys-Ben-Jerrys/2054955512000/ (Accessed: 21 October 2026).</a:t>
+            </a:r>
+            <a:endParaRPr lang="en-US" sz="800" dirty="0"/>
+          </a:p>
+          <a:p>
+            <a:pPr indent="0" marL="0">
+              <a:spcAft>
+                <a:spcPts val="500"/>
+              </a:spcAft>
+              <a:buNone/>
+            </a:pPr>
+            <a:r>
+              <a:rPr lang="en-US" sz="800" dirty="0">
+                <a:solidFill>
+                  <a:schemeClr val="tx1"/>
+                </a:solidFill>
+              </a:rPr>
+              <a:t>Valinsky, J. (2026) 'McCormick is merging with Unilever's food business', CNN, 31 March. Available at: https://kvia.com/news/business-technology/cnn-business-consumer/2026/03/31/mccormick-is-merging-with-unilevers-food-business/ (Accessed: 21 October 2026).</a:t>
+            </a:r>
+            <a:endParaRPr lang="en-US" sz="800" dirty="0"/>
+          </a:p>
+          <a:p>
+            <a:pPr indent="0" marL="0">
+              <a:spcAft>
+                <a:spcPts val="500"/>
+              </a:spcAft>
+              <a:buNone/>
+            </a:pPr>
+            <a:r>
+              <a:rPr lang="en-US" sz="800" dirty="0">
+                <a:solidFill>
+                  <a:schemeClr val="tx1"/>
+                </a:solidFill>
+              </a:rPr>
+              <a:t>Williams, D. (2022) 'Unilever under pressure after GSK consumer bid flop', CHEManager, 25 January. Available at: https://www.chemanager-online.com/en/news/unilever-under-pressure-after-gsk-consumer-bid-flop (Accessed: 21 October 2026).</a:t>
+            </a:r>
+            <a:endParaRPr lang="en-US" sz="800" dirty="0"/>
           </a:p>
         </p:txBody>
       </p:sp>

--- a/content/busi1763/files/Unilever_MA_EN.pptx
+++ b/content/busi1763/files/Unilever_MA_EN.pptx
@@ -110,7 +110,7 @@
   <p:extLst>
     <p:ext uri="{521415D9-36F7-43E2-AB2F-B90AF26B5E84}">
       <p14:sectionLst xmlns:p14="http://schemas.microsoft.com/office/powerpoint/2010/main">
-        <p14:section name="M&amp;A" id="{4dfeab94-4492-07ea-2ea1-9c67a6f14657}">
+        <p14:section name="M&amp;A" id="{b76c4694-df35-e42a-3dbc-0a32dc7bca2c}">
           <p14:sldIdLst>
             <p14:sldId id="256"/>
             <p14:sldId id="257"/>
@@ -2386,7 +2386,7 @@
                   <a:schemeClr val="tx2"/>
                 </a:solidFill>
               </a:rPr>
-              <a:t>Unilever M&amp;A: from buying to selling</a:t>
+              <a:t>M&amp;A 2020–2026: buy beauty, sell food</a:t>
             </a:r>
             <a:endParaRPr lang="en-US" sz="2800" dirty="0"/>
           </a:p>
@@ -2422,7 +2422,7 @@
                   <a:schemeClr val="tx1"/>
                 </a:solidFill>
               </a:rPr>
-              <a:t>Twenty years of growth by acquisition, then a turn to focus</a:t>
+              <a:t>Fewer, faster-growing businesses</a:t>
             </a:r>
             <a:endParaRPr lang="en-US" sz="1300" dirty="0"/>
           </a:p>
@@ -2480,7 +2480,7 @@
                   <a:schemeClr val="tx1"/>
                 </a:solidFill>
               </a:rPr>
-              <a:t>1929 · Born from a merger: Lever Brothers (UK) + Margarine Unie (NL)</a:t>
+              <a:t>Scope: 2020–2026 · Earlier deals: Bestfoods, Ben &amp; Jerry's (2000), Dollar Shave Club (2016)</a:t>
             </a:r>
             <a:endParaRPr lang="en-US" sz="1200" dirty="0"/>
           </a:p>
@@ -2552,7 +2552,7 @@
                   <a:srgbClr val="FFFFFF"/>
                 </a:solidFill>
               </a:rPr>
-              <a:t>Grow and enter new markets</a:t>
+              <a:t>Beauty and personal care</a:t>
             </a:r>
             <a:endParaRPr lang="en-US" sz="1500" dirty="0"/>
           </a:p>
@@ -2608,7 +2608,7 @@
                   <a:srgbClr val="FFFFFF"/>
                 </a:solidFill>
               </a:rPr>
-              <a:t>2000</a:t>
+              <a:t>2021</a:t>
             </a:r>
             <a:endParaRPr lang="en-US" sz="1000" dirty="0"/>
           </a:p>
@@ -2644,7 +2644,7 @@
                   <a:schemeClr val="tx1"/>
                 </a:solidFill>
               </a:rPr>
-              <a:t>Bestfoods</a:t>
+              <a:t>Paula's Choice</a:t>
             </a:r>
             <a:endParaRPr lang="en-US" sz="1250" dirty="0"/>
           </a:p>
@@ -2658,7 +2658,7 @@
                   <a:schemeClr val="accent4"/>
                 </a:solidFill>
               </a:rPr>
-              <a:t>$24.3bn · Knorr, Hellmann's</a:t>
+              <a:t>€1.8bn · digital-led skincare</a:t>
             </a:r>
             <a:endParaRPr lang="en-US" sz="1250" dirty="0"/>
           </a:p>
@@ -2714,7 +2714,7 @@
                   <a:srgbClr val="FFFFFF"/>
                 </a:solidFill>
               </a:rPr>
-              <a:t>2000</a:t>
+              <a:t>2025</a:t>
             </a:r>
             <a:endParaRPr lang="en-US" sz="1000" dirty="0"/>
           </a:p>
@@ -2750,7 +2750,7 @@
                   <a:schemeClr val="tx1"/>
                 </a:solidFill>
               </a:rPr>
-              <a:t>Ben &amp; Jerry's</a:t>
+              <a:t>Dr. Squatch</a:t>
             </a:r>
             <a:endParaRPr lang="en-US" sz="1250" dirty="0"/>
           </a:p>
@@ -2764,7 +2764,7 @@
                   <a:schemeClr val="accent4"/>
                 </a:solidFill>
               </a:rPr>
-              <a:t>$326m · standalone, own board</a:t>
+              <a:t>~$1.5bn (reported) · men's grooming</a:t>
             </a:r>
             <a:endParaRPr lang="en-US" sz="1250" dirty="0"/>
           </a:p>
@@ -2772,113 +2772,7 @@
       </p:sp>
       <p:sp>
         <p:nvSpPr>
-          <p:cNvPr id="14" name="yr02"/>
-          <p:cNvSpPr/>
-          <p:nvPr/>
-        </p:nvSpPr>
-        <p:spPr>
-          <a:xfrm>
-            <a:off x="457200" y="3840480"/>
-            <a:ext cx="475488" cy="475488"/>
-          </a:xfrm>
-          <a:prstGeom prst="ellipse">
-            <a:avLst/>
-          </a:prstGeom>
-          <a:solidFill>
-            <a:schemeClr val="accent1"/>
-          </a:solidFill>
-          <a:ln/>
-        </p:spPr>
-      </p:sp>
-      <p:sp>
-        <p:nvSpPr>
-          <p:cNvPr id="15" name="Text 13"/>
-          <p:cNvSpPr txBox="1"/>
-          <p:nvPr/>
-        </p:nvSpPr>
-        <p:spPr>
-          <a:xfrm>
-            <a:off x="457200" y="3840480"/>
-            <a:ext cx="475488" cy="475488"/>
-          </a:xfrm>
-          <a:prstGeom prst="rect">
-            <a:avLst/>
-          </a:prstGeom>
-          <a:noFill/>
-          <a:ln/>
-        </p:spPr>
-        <p:txBody>
-          <a:bodyPr wrap="square" lIns="0" tIns="0" rIns="0" bIns="0" rtlCol="0" anchor="ctr"/>
-          <a:lstStyle/>
-          <a:p>
-            <a:pPr algn="ctr" indent="0" marL="0">
-              <a:buNone/>
-            </a:pPr>
-            <a:r>
-              <a:rPr lang="en-US" sz="1000" b="1" dirty="0">
-                <a:solidFill>
-                  <a:srgbClr val="FFFFFF"/>
-                </a:solidFill>
-              </a:rPr>
-              <a:t>2016</a:t>
-            </a:r>
-            <a:endParaRPr lang="en-US" sz="1000" dirty="0"/>
-          </a:p>
-        </p:txBody>
-      </p:sp>
-      <p:sp>
-        <p:nvSpPr>
-          <p:cNvPr id="16" name="Text 14"/>
-          <p:cNvSpPr txBox="1"/>
-          <p:nvPr/>
-        </p:nvSpPr>
-        <p:spPr>
-          <a:xfrm>
-            <a:off x="1005840" y="3803904"/>
-            <a:ext cx="2057400" cy="603504"/>
-          </a:xfrm>
-          <a:prstGeom prst="rect">
-            <a:avLst/>
-          </a:prstGeom>
-          <a:noFill/>
-          <a:ln/>
-        </p:spPr>
-        <p:txBody>
-          <a:bodyPr wrap="square" lIns="0" tIns="0" rIns="0" bIns="0" rtlCol="0" anchor="t"/>
-          <a:lstStyle/>
-          <a:p>
-            <a:pPr indent="0" marL="0">
-              <a:buNone/>
-            </a:pPr>
-            <a:r>
-              <a:rPr lang="en-US" sz="1250" b="1" dirty="0">
-                <a:solidFill>
-                  <a:schemeClr val="tx1"/>
-                </a:solidFill>
-              </a:rPr>
-              <a:t>Dollar Shave Club</a:t>
-            </a:r>
-            <a:endParaRPr lang="en-US" sz="1250" dirty="0"/>
-          </a:p>
-          <a:p>
-            <a:pPr indent="0" marL="0">
-              <a:buNone/>
-            </a:pPr>
-            <a:r>
-              <a:rPr lang="en-US" sz="1050" dirty="0">
-                <a:solidFill>
-                  <a:schemeClr val="accent4"/>
-                </a:solidFill>
-              </a:rPr>
-              <a:t>~$1bn · online direct-to-consumer</a:t>
-            </a:r>
-            <a:endParaRPr lang="en-US" sz="1250" dirty="0"/>
-          </a:p>
-        </p:txBody>
-      </p:sp>
-      <p:sp>
-        <p:nvSpPr>
-          <p:cNvPr id="17" name="phase1"/>
+          <p:cNvPr id="14" name="phase1"/>
           <p:cNvSpPr/>
           <p:nvPr/>
         </p:nvSpPr>
@@ -2900,7 +2794,7 @@
       </p:sp>
       <p:sp>
         <p:nvSpPr>
-          <p:cNvPr id="18" name="Text 16"/>
+          <p:cNvPr id="15" name="Text 13"/>
           <p:cNvSpPr txBox="1"/>
           <p:nvPr/>
         </p:nvSpPr>
@@ -2928,7 +2822,7 @@
                   <a:srgbClr val="FFFFFF"/>
                 </a:solidFill>
               </a:rPr>
-              <a:t>TURNING POINT</a:t>
+              <a:t>FAILED BID</a:t>
             </a:r>
             <a:endParaRPr lang="en-US" sz="1500" dirty="0"/>
           </a:p>
@@ -2942,7 +2836,7 @@
                   <a:srgbClr val="FFFFFF"/>
                 </a:solidFill>
               </a:rPr>
-              <a:t>Pressure from bidders, investors</a:t>
+              <a:t>Investors push back</a:t>
             </a:r>
             <a:endParaRPr lang="en-US" sz="1500" dirty="0"/>
           </a:p>
@@ -2950,7 +2844,7 @@
       </p:sp>
       <p:sp>
         <p:nvSpPr>
-          <p:cNvPr id="19" name="yr10"/>
+          <p:cNvPr id="16" name="yr10"/>
           <p:cNvSpPr/>
           <p:nvPr/>
         </p:nvSpPr>
@@ -2970,7 +2864,7 @@
       </p:sp>
       <p:sp>
         <p:nvSpPr>
-          <p:cNvPr id="20" name="Text 18"/>
+          <p:cNvPr id="17" name="Text 15"/>
           <p:cNvSpPr txBox="1"/>
           <p:nvPr/>
         </p:nvSpPr>
@@ -2998,7 +2892,7 @@
                   <a:srgbClr val="FFFFFF"/>
                 </a:solidFill>
               </a:rPr>
-              <a:t>2017</a:t>
+              <a:t>2022</a:t>
             </a:r>
             <a:endParaRPr lang="en-US" sz="1000" dirty="0"/>
           </a:p>
@@ -3006,7 +2900,7 @@
       </p:sp>
       <p:sp>
         <p:nvSpPr>
-          <p:cNvPr id="21" name="Text 19"/>
+          <p:cNvPr id="18" name="Text 16"/>
           <p:cNvSpPr txBox="1"/>
           <p:nvPr/>
         </p:nvSpPr>
@@ -3034,7 +2928,7 @@
                   <a:schemeClr val="tx1"/>
                 </a:solidFill>
               </a:rPr>
-              <a:t>Kraft Heinz bid</a:t>
+              <a:t>GSK Consumer Health</a:t>
             </a:r>
             <a:endParaRPr lang="en-US" sz="1250" dirty="0"/>
           </a:p>
@@ -3048,7 +2942,7 @@
                   <a:schemeClr val="accent4"/>
                 </a:solidFill>
               </a:rPr>
-              <a:t>$143bn offer rejected, then withdrawn</a:t>
+              <a:t>£50bn bid dropped after investors objected</a:t>
             </a:r>
             <a:endParaRPr lang="en-US" sz="1250" dirty="0"/>
           </a:p>
@@ -3056,113 +2950,7 @@
       </p:sp>
       <p:sp>
         <p:nvSpPr>
-          <p:cNvPr id="22" name="yr11"/>
-          <p:cNvSpPr/>
-          <p:nvPr/>
-        </p:nvSpPr>
-        <p:spPr>
-          <a:xfrm>
-            <a:off x="3268980" y="3127248"/>
-            <a:ext cx="475488" cy="475488"/>
-          </a:xfrm>
-          <a:prstGeom prst="ellipse">
-            <a:avLst/>
-          </a:prstGeom>
-          <a:solidFill>
-            <a:schemeClr val="accent3"/>
-          </a:solidFill>
-          <a:ln/>
-        </p:spPr>
-      </p:sp>
-      <p:sp>
-        <p:nvSpPr>
-          <p:cNvPr id="23" name="Text 21"/>
-          <p:cNvSpPr txBox="1"/>
-          <p:nvPr/>
-        </p:nvSpPr>
-        <p:spPr>
-          <a:xfrm>
-            <a:off x="3268980" y="3127248"/>
-            <a:ext cx="475488" cy="475488"/>
-          </a:xfrm>
-          <a:prstGeom prst="rect">
-            <a:avLst/>
-          </a:prstGeom>
-          <a:noFill/>
-          <a:ln/>
-        </p:spPr>
-        <p:txBody>
-          <a:bodyPr wrap="square" lIns="0" tIns="0" rIns="0" bIns="0" rtlCol="0" anchor="ctr"/>
-          <a:lstStyle/>
-          <a:p>
-            <a:pPr algn="ctr" indent="0" marL="0">
-              <a:buNone/>
-            </a:pPr>
-            <a:r>
-              <a:rPr lang="en-US" sz="1000" b="1" dirty="0">
-                <a:solidFill>
-                  <a:srgbClr val="FFFFFF"/>
-                </a:solidFill>
-              </a:rPr>
-              <a:t>2022</a:t>
-            </a:r>
-            <a:endParaRPr lang="en-US" sz="1000" dirty="0"/>
-          </a:p>
-        </p:txBody>
-      </p:sp>
-      <p:sp>
-        <p:nvSpPr>
-          <p:cNvPr id="24" name="Text 22"/>
-          <p:cNvSpPr txBox="1"/>
-          <p:nvPr/>
-        </p:nvSpPr>
-        <p:spPr>
-          <a:xfrm>
-            <a:off x="3817620" y="3090672"/>
-            <a:ext cx="2057400" cy="603504"/>
-          </a:xfrm>
-          <a:prstGeom prst="rect">
-            <a:avLst/>
-          </a:prstGeom>
-          <a:noFill/>
-          <a:ln/>
-        </p:spPr>
-        <p:txBody>
-          <a:bodyPr wrap="square" lIns="0" tIns="0" rIns="0" bIns="0" rtlCol="0" anchor="t"/>
-          <a:lstStyle/>
-          <a:p>
-            <a:pPr indent="0" marL="0">
-              <a:buNone/>
-            </a:pPr>
-            <a:r>
-              <a:rPr lang="en-US" sz="1250" b="1" dirty="0">
-                <a:solidFill>
-                  <a:schemeClr val="tx1"/>
-                </a:solidFill>
-              </a:rPr>
-              <a:t>GSK Consumer Health</a:t>
-            </a:r>
-            <a:endParaRPr lang="en-US" sz="1250" dirty="0"/>
-          </a:p>
-          <a:p>
-            <a:pPr indent="0" marL="0">
-              <a:buNone/>
-            </a:pPr>
-            <a:r>
-              <a:rPr lang="en-US" sz="1050" dirty="0">
-                <a:solidFill>
-                  <a:schemeClr val="accent4"/>
-                </a:solidFill>
-              </a:rPr>
-              <a:t>£50bn bid dropped after investors objected</a:t>
-            </a:r>
-            <a:endParaRPr lang="en-US" sz="1250" dirty="0"/>
-          </a:p>
-        </p:txBody>
-      </p:sp>
-      <p:sp>
-        <p:nvSpPr>
-          <p:cNvPr id="25" name="phase2"/>
+          <p:cNvPr id="19" name="phase2"/>
           <p:cNvSpPr/>
           <p:nvPr/>
         </p:nvSpPr>
@@ -3184,7 +2972,7 @@
       </p:sp>
       <p:sp>
         <p:nvSpPr>
-          <p:cNvPr id="26" name="Text 24"/>
+          <p:cNvPr id="20" name="Text 18"/>
           <p:cNvSpPr txBox="1"/>
           <p:nvPr/>
         </p:nvSpPr>
@@ -3234,7 +3022,7 @@
       </p:sp>
       <p:sp>
         <p:nvSpPr>
-          <p:cNvPr id="27" name="yr20"/>
+          <p:cNvPr id="21" name="yr20"/>
           <p:cNvSpPr/>
           <p:nvPr/>
         </p:nvSpPr>
@@ -3254,7 +3042,7 @@
       </p:sp>
       <p:sp>
         <p:nvSpPr>
-          <p:cNvPr id="28" name="Text 26"/>
+          <p:cNvPr id="22" name="Text 20"/>
           <p:cNvSpPr txBox="1"/>
           <p:nvPr/>
         </p:nvSpPr>
@@ -3290,7 +3078,7 @@
       </p:sp>
       <p:sp>
         <p:nvSpPr>
-          <p:cNvPr id="29" name="Text 27"/>
+          <p:cNvPr id="23" name="Text 21"/>
           <p:cNvSpPr txBox="1"/>
           <p:nvPr/>
         </p:nvSpPr>
@@ -3340,7 +3128,7 @@
       </p:sp>
       <p:sp>
         <p:nvSpPr>
-          <p:cNvPr id="30" name="yr21"/>
+          <p:cNvPr id="24" name="yr21"/>
           <p:cNvSpPr/>
           <p:nvPr/>
         </p:nvSpPr>
@@ -3360,7 +3148,7 @@
       </p:sp>
       <p:sp>
         <p:nvSpPr>
-          <p:cNvPr id="31" name="Text 29"/>
+          <p:cNvPr id="25" name="Text 23"/>
           <p:cNvSpPr txBox="1"/>
           <p:nvPr/>
         </p:nvSpPr>
@@ -3396,7 +3184,7 @@
       </p:sp>
       <p:sp>
         <p:nvSpPr>
-          <p:cNvPr id="32" name="Text 30"/>
+          <p:cNvPr id="26" name="Text 24"/>
           <p:cNvSpPr txBox="1"/>
           <p:nvPr/>
         </p:nvSpPr>
@@ -3446,7 +3234,7 @@
       </p:sp>
       <p:sp>
         <p:nvSpPr>
-          <p:cNvPr id="33" name="yr22"/>
+          <p:cNvPr id="27" name="yr22"/>
           <p:cNvSpPr/>
           <p:nvPr/>
         </p:nvSpPr>
@@ -3466,7 +3254,7 @@
       </p:sp>
       <p:sp>
         <p:nvSpPr>
-          <p:cNvPr id="34" name="Text 32"/>
+          <p:cNvPr id="28" name="Text 26"/>
           <p:cNvSpPr txBox="1"/>
           <p:nvPr/>
         </p:nvSpPr>
@@ -3502,7 +3290,7 @@
       </p:sp>
       <p:sp>
         <p:nvSpPr>
-          <p:cNvPr id="35" name="Text 33"/>
+          <p:cNvPr id="29" name="Text 27"/>
           <p:cNvSpPr txBox="1"/>
           <p:nvPr/>
         </p:nvSpPr>
@@ -3552,7 +3340,7 @@
       </p:sp>
       <p:sp>
         <p:nvSpPr>
-          <p:cNvPr id="36" name="Text 34"/>
+          <p:cNvPr id="30" name="Text 28"/>
           <p:cNvSpPr txBox="1"/>
           <p:nvPr/>
         </p:nvSpPr>
@@ -3580,7 +3368,7 @@
                   <a:schemeClr val="accent4"/>
                 </a:solidFill>
               </a:rPr>
-              <a:t>Sources: Encyclopedia.com (n.d.); CNNfn (2000); UPI (2000); Primack (2016); Associated Press (2017); Williams (2022); James (2023); Reuters (2025); Redmond (2026).</a:t>
+              <a:t>Sources: CNNfn (2000); UPI (2000); Primack (2016); Unilever PLC (2022); Williams (2022); James (2023); Jobe (2025); Reuters (2025); Redmond (2026).</a:t>
             </a:r>
             <a:endParaRPr lang="en-US" sz="800" dirty="0"/>
           </a:p>
@@ -4276,7 +4064,7 @@
                   <a:srgbClr val="FFFFFF"/>
                 </a:solidFill>
               </a:rPr>
-              <a:t>Overall a success: M&amp;A built Unilever into a global giant. But deals without synergy, like Dollar Shave Club, failed.</a:t>
+              <a:t>Overall a success: M&amp;A helped Unilever grow and now helps it focus on beauty and personal care. But deals without synergy, like Dollar Shave Club, failed.</a:t>
             </a:r>
             <a:endParaRPr lang="en-US" sz="1300" dirty="0"/>
           </a:p>
@@ -4414,7 +4202,7 @@
                   <a:schemeClr val="tx1"/>
                 </a:solidFill>
               </a:rPr>
-              <a:t>Associated Press (2017) 'Kraft Heinz withdraws $143 billion bid to buy Unilever', NBC News, 19 February. Available at: https://www.nbcnews.com/news/us-news/kraft-heinz-withdraws-143-billion-bid-buy-unilever-n723041 (Accessed: 21 October 2026).</a:t>
+              <a:t>Barber, L. (2026) 'Unilever confirms food spin-off sale talks as beauty portfolio takes centre stage', Cosmetics Business, 20 March. Available at: https://cosmeticsbusiness.com/unilever-confirms-food-sale-talks-beauty-focus (Accessed: 21 October 2026).</a:t>
             </a:r>
             <a:endParaRPr lang="en-US" sz="800" dirty="0"/>
           </a:p>
@@ -4431,7 +4219,7 @@
                   <a:schemeClr val="tx1"/>
                 </a:solidFill>
               </a:rPr>
-              <a:t>Barber, L. (2026) 'Unilever confirms food spin-off sale talks as beauty portfolio takes centre stage', Cosmetics Business, 20 March. Available at: https://cosmeticsbusiness.com/unilever-confirms-food-sale-talks-beauty-focus (Accessed: 21 October 2026).</a:t>
+              <a:t>Christensen, C.M., Alton, R., Rising, C. and Waldeck, A. (2011) 'The new M&amp;A playbook', Harvard Business Review, 89(3), pp. 48–57.</a:t>
             </a:r>
             <a:endParaRPr lang="en-US" sz="800" dirty="0"/>
           </a:p>
@@ -4448,7 +4236,7 @@
                   <a:schemeClr val="tx1"/>
                 </a:solidFill>
               </a:rPr>
-              <a:t>Christensen, C.M., Alton, R., Rising, C. and Waldeck, A. (2011) 'The new M&amp;A playbook', Harvard Business Review, 89(3), pp. 48–57.</a:t>
+              <a:t>CNNfn (2000) 'Unilever wins Bestfoods', CNNMoney, 6 June. Available at: https://money.cnn.com/2000/06/06/deals/bestfoods/ (Accessed: 21 October 2026).</a:t>
             </a:r>
             <a:endParaRPr lang="en-US" sz="800" dirty="0"/>
           </a:p>
@@ -4465,7 +4253,7 @@
                   <a:schemeClr val="tx1"/>
                 </a:solidFill>
               </a:rPr>
-              <a:t>CNNfn (2000) 'Unilever wins Bestfoods', CNNMoney, 6 June. Available at: https://money.cnn.com/2000/06/06/deals/bestfoods/ (Accessed: 21 October 2026).</a:t>
+              <a:t>James, D. (2023) 'Unilever to sell Dollar Shave Club', Retail Dive, 26 October. Available at: https://www.retaildive.com/news/unilever-sells-razor-subscription-brand-dollar-shave-club/697913 (Accessed: 21 October 2026).</a:t>
             </a:r>
             <a:endParaRPr lang="en-US" sz="800" dirty="0"/>
           </a:p>
@@ -4482,7 +4270,7 @@
                   <a:schemeClr val="tx1"/>
                 </a:solidFill>
               </a:rPr>
-              <a:t>Encyclopedia.com (n.d.) 'Unilever', International Directory of Company Histories. Available at: https://www.encyclopedia.com/books/politics-and-business-magazines/unilever (Accessed: 21 October 2026).</a:t>
+              <a:t>Jobe, N. (2025) 'Unilever to pay $1.5 billion for men's grooming brand Dr. Squatch', Cosmetics Business, 1 July. Available at: https://cosmeticsbusiness.com/unilever-to-pay-1-5-billion-for-men-s-grooming (Accessed: 21 October 2026).</a:t>
             </a:r>
             <a:endParaRPr lang="en-US" sz="800" dirty="0"/>
           </a:p>
@@ -4499,7 +4287,7 @@
                   <a:schemeClr val="tx1"/>
                 </a:solidFill>
               </a:rPr>
-              <a:t>James, D. (2023) 'Unilever to sell Dollar Shave Club', Retail Dive, 26 October. Available at: https://www.retaildive.com/news/unilever-sells-razor-subscription-brand-dollar-shave-club/697913 (Accessed: 21 October 2026).</a:t>
+              <a:t>Primack, D. (2016) 'Unilever buys Dollar Shave Club for $1 billion', Fortune, 19 July. Available at: https://fortune.com/2016/07/19/unilever-buys-dollar-shave-club-for-1-billion (Accessed: 21 October 2026).</a:t>
             </a:r>
             <a:endParaRPr lang="en-US" sz="800" dirty="0"/>
           </a:p>
@@ -4516,7 +4304,7 @@
                   <a:schemeClr val="tx1"/>
                 </a:solidFill>
               </a:rPr>
-              <a:t>Primack, D. (2016) 'Unilever buys Dollar Shave Club for $1 billion', Fortune, 19 July. Available at: https://fortune.com/2016/07/19/unilever-buys-dollar-shave-club-for-1-billion (Accessed: 21 October 2026).</a:t>
+              <a:t>Redmond, K. (2026) 'McCormick to acquire Unilever's food business in $44.8B deal', NJBIZ, 1 April. Available at: https://njbiz.com/mccormick-unilever-food-business-44-8b-deal/ (Accessed: 21 October 2026).</a:t>
             </a:r>
             <a:endParaRPr lang="en-US" sz="800" dirty="0"/>
           </a:p>
@@ -4555,7 +4343,7 @@
                   <a:schemeClr val="tx1"/>
                 </a:solidFill>
               </a:rPr>
-              <a:t>Redmond, K. (2026) 'McCormick to acquire Unilever's food business in $44.8B deal', NJBIZ, 1 April. Available at: https://njbiz.com/mccormick-unilever-food-business-44-8b-deal/ (Accessed: 21 October 2026).</a:t>
+              <a:t>Reuters (2025) 'Magnum Ice Cream valued at $9.1 billion in Amsterdam listing', MarketScreener, 8 December. Available at: https://www.marketscreener.com/news/unilever-completes-ice-cream-demerger-with-magnum-set-to-list-ce7d51dddc8df620 (Accessed: 21 October 2026).</a:t>
             </a:r>
             <a:endParaRPr lang="en-US" sz="800" dirty="0"/>
           </a:p>
@@ -4572,7 +4360,7 @@
                   <a:schemeClr val="tx1"/>
                 </a:solidFill>
               </a:rPr>
-              <a:t>Reuters (2025) 'Magnum Ice Cream valued at $9.1 billion in Amsterdam listing', MarketScreener, 8 December. Available at: https://www.marketscreener.com/news/unilever-completes-ice-cream-demerger-with-magnum-set-to-list-ce7d51dddc8df620 (Accessed: 21 October 2026).</a:t>
+              <a:t>Unilever PLC (2022) Annual Report on Form 20-F 2021. Available at: https://www.sec.gov/Archives/edgar/data/217410/000021741022000009/ul-20211231.htm (Accessed: 21 October 2026).</a:t>
             </a:r>
             <a:endParaRPr lang="en-US" sz="800" dirty="0"/>
           </a:p>

--- a/content/busi1763/files/Unilever_MA_EN.pptx
+++ b/content/busi1763/files/Unilever_MA_EN.pptx
@@ -110,7 +110,7 @@
   <p:extLst>
     <p:ext uri="{521415D9-36F7-43E2-AB2F-B90AF26B5E84}">
       <p14:sectionLst xmlns:p14="http://schemas.microsoft.com/office/powerpoint/2010/main">
-        <p14:section name="M&amp;A" id="{b76c4694-df35-e42a-3dbc-0a32dc7bca2c}">
+        <p14:section name="M&amp;A" id="{33379b8b-6263-3d0c-3f6a-72acece91748}">
           <p14:sldIdLst>
             <p14:sldId id="256"/>
             <p14:sldId id="257"/>
@@ -522,7 +522,7 @@
           <a:p>
             <a:r>
               <a:rPr lang="en-US" dirty="0"/>
-              <a:t>M&amp;A means mergers and acquisitions. Acquisition: one company buys another. Merger: two similar companies join. Six types, four ways to integrate, the goal is synergy, but 70 to 90 percent fail, mostly at integration. Cross-border M&amp;A is also a form of FDI.</a:t>
+              <a:t>Thank you. My part is M&amp;A, mergers and acquisitions. In an acquisition, one company buys another. In a merger, two similar companies join into one. The goal is synergy: one plus one is more than two. But 70 to 90 percent of deals fail, mostly because joining two companies is hard. Also, buying a company in another country is a kind of FDI.</a:t>
             </a:r>
             <a:endParaRPr lang="en-US" dirty="0"/>
           </a:p>
@@ -698,7 +698,7 @@
           <a:p>
             <a:r>
               <a:rPr lang="en-US" dirty="0"/>
-              <a:t>Why sell food? It grows slowly, a spin-off releases value and avoids the conglomerate discount, and the cash can buy beauty brands. Through M&amp;A theory: the deal is horizontal, the synergy is about 300 million dollars a year, and the risks are people integration, regulators, and a long timeline to 2027. My conclusion: overall a success, but deals without synergy failed. Cross-border M&amp;A is also one form of FDI.</a:t>
+              <a:t>Why sell food? Food grows slowly, only 2.5 percent in 2025. A spin-off can release value, and Unilever gets 15.7 billion dollars to buy beauty brands. This deal is horizontal, because both companies sell sauces and seasonings. The synergy is about 300 million dollars a year. The risks: joining people is hard, regulators must agree, and the deal will close only in 2027. My conclusion: overall, M&amp;A is a success for Unilever. It helps Unilever grow and focus. But deals with no synergy, like Dollar Shave Club, failed.</a:t>
             </a:r>
             <a:endParaRPr lang="en-US" dirty="0"/>
           </a:p>
